--- a/Topic_D/Exam_Practice/TD-L12_Speaking_Workshop_Topic_D_Review_and_Four_Skills_Assessment.pptx
+++ b/Topic_D/Exam_Practice/TD-L12_Speaking_Workshop_Topic_D_Review_and_Four_Skills_Assessment.pptx
@@ -615,7 +615,11 @@
           <a:lstStyle/>
           <a:p>
             <a:r>
-              <a:rPr lang="en-US" dirty="0"/>
+              <a:rPr lang="ar-SA" dirty="0">
+                <a:latin typeface="Amiri" pitchFamily="2" charset="-78"/>
+                <a:ea typeface="Amiri" pitchFamily="2" charset="-78"/>
+                <a:cs typeface="Amiri" pitchFamily="2" charset="-78"/>
+              </a:rPr>
               <a:t>ROLE PLAY C (Develop) — a meeting with a teacher.
 SET-UP IN THE BREAKOUT ROOM: A = examiner (reads the left column ONLY — the questions, in order), B = candidate (sees the task column; Core may use the help column), C = observer (ticks the feedback checklist). 1 minute preparation, about 3 minutes speaking, 1 minute feedback, then rotate.
 Task ! is the unexpected question: in the exam the candidate has not seen it — the examiner should read it without warning.
@@ -707,7 +711,11 @@
           <a:lstStyle/>
           <a:p>
             <a:r>
-              <a:rPr lang="en-US" dirty="0"/>
+              <a:rPr lang="ar-SA" dirty="0">
+                <a:latin typeface="Amiri" pitchFamily="2" charset="-78"/>
+                <a:ea typeface="Amiri" pitchFamily="2" charset="-78"/>
+                <a:cs typeface="Amiri" pitchFamily="2" charset="-78"/>
+              </a:rPr>
               <a:t>ROLE PLAY D (Stretch) — a formal interview.
 SET-UP IN THE BREAKOUT ROOM: A = examiner (reads the left column ONLY — the questions, in order), B = candidate (sees the task column; Core may use the help column), C = observer (ticks the feedback checklist). 1 minute preparation, about 3 minutes speaking, 1 minute feedback, then rotate.
 Task ! is the unexpected question: in the exam the candidate has not seen it — the examiner should read it without warning.
@@ -1243,7 +1251,11 @@
           <a:lstStyle/>
           <a:p>
             <a:r>
-              <a:rPr lang="en-US" dirty="0"/>
+              <a:rPr lang="ar-SA" dirty="0">
+                <a:latin typeface="Amiri" pitchFamily="2" charset="-78"/>
+                <a:ea typeface="Amiri" pitchFamily="2" charset="-78"/>
+                <a:cs typeface="Amiri" pitchFamily="2" charset="-78"/>
+              </a:rPr>
               <a:t>TOPIC CONVERSATION — Core. Examiner asks the questions in order and may add “لِمَاذَا؟ / هَلْ يُمْكِنُ أَنْ تَشْرَحَ أَكْثَرَ؟” to push for more. Candidate aims for one full sentence per question.
 </a:t>
             </a:r>
@@ -1332,7 +1344,11 @@
           <a:lstStyle/>
           <a:p>
             <a:r>
-              <a:rPr lang="en-US" dirty="0"/>
+              <a:rPr lang="ar-SA" dirty="0">
+                <a:latin typeface="Amiri" pitchFamily="2" charset="-78"/>
+                <a:ea typeface="Amiri" pitchFamily="2" charset="-78"/>
+                <a:cs typeface="Amiri" pitchFamily="2" charset="-78"/>
+              </a:rPr>
               <a:t>TOPIC CONVERSATION — Develop. Examiner asks the questions in order and may add “لِمَاذَا؟ / هَلْ يُمْكِنُ أَنْ تَشْرَحَ أَكْثَرَ؟” to push for more. Candidate aims for two or three sentences, mixing time frames.
 </a:t>
             </a:r>
@@ -1421,7 +1437,11 @@
           <a:lstStyle/>
           <a:p>
             <a:r>
-              <a:rPr lang="en-US" dirty="0"/>
+              <a:rPr lang="ar-SA" dirty="0">
+                <a:latin typeface="Amiri" pitchFamily="2" charset="-78"/>
+                <a:ea typeface="Amiri" pitchFamily="2" charset="-78"/>
+                <a:cs typeface="Amiri" pitchFamily="2" charset="-78"/>
+              </a:rPr>
               <a:t>TOPIC CONVERSATION — Stretch. Examiner asks the questions in order and may add “لِمَاذَا؟ / هَلْ يُمْكِنُ أَنْ تَشْرَحَ أَكْثَرَ؟” to push for more. Candidate aims for a developed answer: opinion, balance, concession and a conditional.
 </a:t>
             </a:r>
@@ -1510,7 +1530,11 @@
           <a:lstStyle/>
           <a:p>
             <a:r>
-              <a:rPr lang="en-US" dirty="0"/>
+              <a:rPr lang="ar-SA" dirty="0">
+                <a:latin typeface="Amiri" pitchFamily="2" charset="-78"/>
+                <a:ea typeface="Amiri" pitchFamily="2" charset="-78"/>
+                <a:cs typeface="Amiri" pitchFamily="2" charset="-78"/>
+              </a:rPr>
               <a:t>WELCOME (1 min) — while students join.
 • Greet each student by name as they arrive: السَّلَامُ عَلَيْكُمْ. Take the register (Pastoral Tracker: attendance 0/1).
 • 2-MINUTE CHECK-IN (SEND training): a private chat to any student who seemed unsettled last lesson — “Are you okay today? 👍 / 👎”.
@@ -2224,7 +2248,11 @@
           <a:lstStyle/>
           <a:p>
             <a:r>
-              <a:rPr lang="en-US" dirty="0"/>
+              <a:rPr lang="ar-SA" dirty="0">
+                <a:latin typeface="Amiri" pitchFamily="2" charset="-78"/>
+                <a:ea typeface="Amiri" pitchFamily="2" charset="-78"/>
+                <a:cs typeface="Amiri" pitchFamily="2" charset="-78"/>
+              </a:rPr>
               <a:t>TEACH (3 min). Role play = precise and complete; conversation = develop. Choral repetition of the repair phrases. To a girl: تُعِيدِي.</a:t>
             </a:r>
             <a:endParaRPr lang="en-US" dirty="0"/>
@@ -2576,7 +2604,11 @@
           <a:lstStyle/>
           <a:p>
             <a:r>
-              <a:rPr lang="en-US" dirty="0"/>
+              <a:rPr lang="ar-SA" dirty="0">
+                <a:latin typeface="Amiri" pitchFamily="2" charset="-78"/>
+                <a:ea typeface="Amiri" pitchFamily="2" charset="-78"/>
+                <a:cs typeface="Amiri" pitchFamily="2" charset="-78"/>
+              </a:rPr>
               <a:t>ROLE PLAY A (Core) — a language institute.
 SET-UP IN THE BREAKOUT ROOM: A = examiner (reads the left column ONLY — the questions, in order), B = candidate (sees the task column; Core may use the help column), C = observer (ticks the feedback checklist). 1 minute preparation, about 3 minutes speaking, 1 minute feedback, then rotate.
 Task ! is the unexpected question: in the exam the candidate has not seen it — the examiner should read it without warning.
@@ -2668,7 +2700,11 @@
           <a:lstStyle/>
           <a:p>
             <a:r>
-              <a:rPr lang="en-US" dirty="0"/>
+              <a:rPr lang="ar-SA" dirty="0">
+                <a:latin typeface="Amiri" pitchFamily="2" charset="-78"/>
+                <a:ea typeface="Amiri" pitchFamily="2" charset="-78"/>
+                <a:cs typeface="Amiri" pitchFamily="2" charset="-78"/>
+              </a:rPr>
               <a:t>ROLE PLAY B (Core+) — a phone call.
 SET-UP IN THE BREAKOUT ROOM: A = examiner (reads the left column ONLY — the questions, in order), B = candidate (sees the task column; Core may use the help column), C = observer (ticks the feedback checklist). 1 minute preparation, about 3 minutes speaking, 1 minute feedback, then rotate.
 Task ! is the unexpected question: in the exam the candidate has not seen it — the examiner should read it without warning.
@@ -3156,6 +3192,7 @@
                   <a:srgbClr val="D4AF37"/>
                 </a:solidFill>
                 <a:latin typeface="Amiri" pitchFamily="2" charset="-78"/>
+                <a:ea typeface="Amiri" pitchFamily="2" charset="-78"/>
                 <a:cs typeface="Amiri" pitchFamily="2" charset="-78"/>
               </a:rPr>
               <a:t>م</a:t>
@@ -3362,6 +3399,7 @@
                   <a:srgbClr val="D4AF37"/>
                 </a:solidFill>
                 <a:latin typeface="Amiri" pitchFamily="2" charset="-78"/>
+                <a:ea typeface="Amiri" pitchFamily="2" charset="-78"/>
                 <a:cs typeface="Amiri" pitchFamily="2" charset="-78"/>
               </a:rPr>
               <a:t>وَرْشَةُ التَّحَدُّثِ — امْتِحَانٌ تَجْرِيبِيٌّ</a:t>
@@ -3819,6 +3857,7 @@
                   <a:srgbClr val="D4AF37"/>
                 </a:solidFill>
                 <a:latin typeface="Amiri" pitchFamily="2" charset="-78"/>
+                <a:ea typeface="Amiri" pitchFamily="2" charset="-78"/>
                 <a:cs typeface="Amiri" pitchFamily="2" charset="-78"/>
               </a:rPr>
               <a:t>م</a:t>
@@ -4139,6 +4178,7 @@
                   <a:srgbClr val="8A6D1E"/>
                 </a:solidFill>
                 <a:latin typeface="Amiri" pitchFamily="2" charset="-78"/>
+                <a:ea typeface="Amiri" pitchFamily="2" charset="-78"/>
                 <a:cs typeface="Amiri" pitchFamily="2" charset="-78"/>
               </a:rPr>
               <a:t>يَوْمُ النَّتَائِجِ وَاخْتِيَارُ الدِّرَاسَةِ</a:t>
@@ -4419,6 +4459,7 @@
                   <a:srgbClr val="1B3B6F"/>
                 </a:solidFill>
                 <a:latin typeface="Amiri" pitchFamily="2" charset="-78"/>
+                <a:ea typeface="Amiri" pitchFamily="2" charset="-78"/>
                 <a:cs typeface="Amiri" pitchFamily="2" charset="-78"/>
               </a:rPr>
               <a:t>نَجَحْتُ فِي … وَكَانَتْ … أَفْضَلَ مِنْ …</a:t>
@@ -4495,6 +4536,7 @@
                   <a:srgbClr val="1B3B6F"/>
                 </a:solidFill>
                 <a:latin typeface="Amiri" pitchFamily="2" charset="-78"/>
+                <a:ea typeface="Amiri" pitchFamily="2" charset="-78"/>
                 <a:cs typeface="Amiri" pitchFamily="2" charset="-78"/>
               </a:rPr>
               <a:t>مَبْرُوكٌ عَلَى النَّتَائِجِ! كَيْفَ كَانَتْ؟</a:t>
@@ -4598,6 +4640,7 @@
                   <a:srgbClr val="1B3B6F"/>
                 </a:solidFill>
                 <a:latin typeface="Amiri" pitchFamily="2" charset="-78"/>
+                <a:ea typeface="Amiri" pitchFamily="2" charset="-78"/>
                 <a:cs typeface="Amiri" pitchFamily="2" charset="-78"/>
               </a:rPr>
               <a:t>أَوَّلًا … ثُمَّ … بِالإِضَافَةِ إِلَى ذٰلِكَ …</a:t>
@@ -4674,6 +4717,7 @@
                   <a:srgbClr val="1B3B6F"/>
                 </a:solidFill>
                 <a:latin typeface="Amiri" pitchFamily="2" charset="-78"/>
+                <a:ea typeface="Amiri" pitchFamily="2" charset="-78"/>
                 <a:cs typeface="Amiri" pitchFamily="2" charset="-78"/>
               </a:rPr>
               <a:t>مَا السِّرُّ؟ كَيْفَ رَاجَعْتَ؟</a:t>
@@ -4777,6 +4821,7 @@
                   <a:srgbClr val="1B3B6F"/>
                 </a:solidFill>
                 <a:latin typeface="Amiri" pitchFamily="2" charset="-78"/>
+                <a:ea typeface="Amiri" pitchFamily="2" charset="-78"/>
                 <a:cs typeface="Amiri" pitchFamily="2" charset="-78"/>
               </a:rPr>
               <a:t>أُرِيدُ دِرَاسَةَ … لِأَنَّ …</a:t>
@@ -4853,6 +4898,7 @@
                   <a:srgbClr val="1B3B6F"/>
                 </a:solidFill>
                 <a:latin typeface="Amiri" pitchFamily="2" charset="-78"/>
+                <a:ea typeface="Amiri" pitchFamily="2" charset="-78"/>
                 <a:cs typeface="Amiri" pitchFamily="2" charset="-78"/>
               </a:rPr>
               <a:t>مَاذَا تُرِيدُ أَنْ تَدْرُسَ بَعْدَ ذٰلِكَ؟</a:t>
@@ -4959,6 +5005,7 @@
                   <a:srgbClr val="1B3B6F"/>
                 </a:solidFill>
                 <a:latin typeface="Amiri" pitchFamily="2" charset="-78"/>
+                <a:ea typeface="Amiri" pitchFamily="2" charset="-78"/>
                 <a:cs typeface="Amiri" pitchFamily="2" charset="-78"/>
               </a:rPr>
               <a:t>الدَّوْرَةُ … أَمَّا المَسَارُ الأَكَادِيمِيُّ فَيَفْتَحُ … لِذٰلِكَ …</a:t>
@@ -5035,6 +5082,7 @@
                   <a:srgbClr val="1B3B6F"/>
                 </a:solidFill>
                 <a:latin typeface="Amiri" pitchFamily="2" charset="-78"/>
+                <a:ea typeface="Amiri" pitchFamily="2" charset="-78"/>
                 <a:cs typeface="Amiri" pitchFamily="2" charset="-78"/>
               </a:rPr>
               <a:t>هُنَاكَ دَوْرَةٌ مِهْنِيَّةٌ أَوْ مَسَارٌ أَكَادِيمِيٌّ.</a:t>
@@ -5138,6 +5186,7 @@
                   <a:srgbClr val="1B3B6F"/>
                 </a:solidFill>
                 <a:latin typeface="Amiri" pitchFamily="2" charset="-78"/>
+                <a:ea typeface="Amiri" pitchFamily="2" charset="-78"/>
                 <a:cs typeface="Amiri" pitchFamily="2" charset="-78"/>
               </a:rPr>
               <a:t>إِذَا …، فَسَوْفَ …</a:t>
@@ -5214,6 +5263,7 @@
                   <a:srgbClr val="1B3B6F"/>
                 </a:solidFill>
                 <a:latin typeface="Amiri" pitchFamily="2" charset="-78"/>
+                <a:ea typeface="Amiri" pitchFamily="2" charset="-78"/>
                 <a:cs typeface="Amiri" pitchFamily="2" charset="-78"/>
               </a:rPr>
               <a:t>وَإِذَا تَغَيَّرَ رَأْيُكَ بَعْدَ سَنَةٍ؟</a:t>
@@ -5423,6 +5473,7 @@
                   <a:srgbClr val="D4AF37"/>
                 </a:solidFill>
                 <a:latin typeface="Amiri" pitchFamily="2" charset="-78"/>
+                <a:ea typeface="Amiri" pitchFamily="2" charset="-78"/>
                 <a:cs typeface="Amiri" pitchFamily="2" charset="-78"/>
               </a:rPr>
               <a:t>م</a:t>
@@ -5743,6 +5794,7 @@
                   <a:srgbClr val="8A6D1E"/>
                 </a:solidFill>
                 <a:latin typeface="Amiri" pitchFamily="2" charset="-78"/>
+                <a:ea typeface="Amiri" pitchFamily="2" charset="-78"/>
                 <a:cs typeface="Amiri" pitchFamily="2" charset="-78"/>
               </a:rPr>
               <a:t>مُقَابَلَةُ عَمَلٍ فِي المَتْحَفِ</a:t>
@@ -6023,6 +6075,7 @@
                   <a:srgbClr val="1B3B6F"/>
                 </a:solidFill>
                 <a:latin typeface="Amiri" pitchFamily="2" charset="-78"/>
+                <a:ea typeface="Amiri" pitchFamily="2" charset="-78"/>
                 <a:cs typeface="Amiri" pitchFamily="2" charset="-78"/>
               </a:rPr>
               <a:t>يَسُرُّنِي أَنْ … فَقَدْ … مُنْذُ …</a:t>
@@ -6099,6 +6152,7 @@
                   <a:srgbClr val="1B3B6F"/>
                 </a:solidFill>
                 <a:latin typeface="Amiri" pitchFamily="2" charset="-78"/>
+                <a:ea typeface="Amiri" pitchFamily="2" charset="-78"/>
                 <a:cs typeface="Amiri" pitchFamily="2" charset="-78"/>
               </a:rPr>
               <a:t>لِمَاذَا تَقَدَّمْتَ لِهٰذِهِ الوَظِيفَةِ؟</a:t>
@@ -6202,6 +6256,7 @@
                   <a:srgbClr val="1B3B6F"/>
                 </a:solidFill>
                 <a:latin typeface="Amiri" pitchFamily="2" charset="-78"/>
+                <a:ea typeface="Amiri" pitchFamily="2" charset="-78"/>
                 <a:cs typeface="Amiri" pitchFamily="2" charset="-78"/>
               </a:rPr>
               <a:t>فِي … كُنْتُ … فَتَعَلَّمْتُ أَنْ …</a:t>
@@ -6278,6 +6333,7 @@
                   <a:srgbClr val="1B3B6F"/>
                 </a:solidFill>
                 <a:latin typeface="Amiri" pitchFamily="2" charset="-78"/>
+                <a:ea typeface="Amiri" pitchFamily="2" charset="-78"/>
                 <a:cs typeface="Amiri" pitchFamily="2" charset="-78"/>
               </a:rPr>
               <a:t>هَلْ عِنْدَكَ خِبْرَةٌ فِي العَمَلِ مَعَ الأَطْفَالِ؟</a:t>
@@ -6381,6 +6437,7 @@
                   <a:srgbClr val="1B3B6F"/>
                 </a:solidFill>
                 <a:latin typeface="Amiri" pitchFamily="2" charset="-78"/>
+                <a:ea typeface="Amiri" pitchFamily="2" charset="-78"/>
                 <a:cs typeface="Amiri" pitchFamily="2" charset="-78"/>
               </a:rPr>
               <a:t>كُنْتُ … أَمَّا الآنَ فَأَتَدَرَّبُ …</a:t>
@@ -6457,6 +6514,7 @@
                   <a:srgbClr val="1B3B6F"/>
                 </a:solidFill>
                 <a:latin typeface="Amiri" pitchFamily="2" charset="-78"/>
+                <a:ea typeface="Amiri" pitchFamily="2" charset="-78"/>
                 <a:cs typeface="Amiri" pitchFamily="2" charset="-78"/>
               </a:rPr>
               <a:t>مَا نُقْطَةُ ضَعْفِكَ؟</a:t>
@@ -6560,6 +6618,7 @@
                   <a:srgbClr val="1B3B6F"/>
                 </a:solidFill>
                 <a:latin typeface="Amiri" pitchFamily="2" charset="-78"/>
+                <a:ea typeface="Amiri" pitchFamily="2" charset="-78"/>
                 <a:cs typeface="Amiri" pitchFamily="2" charset="-78"/>
               </a:rPr>
               <a:t>صَحِيحٌ أَنَّ … غَيْرَ أَنَّ …</a:t>
@@ -6636,6 +6695,7 @@
                   <a:srgbClr val="1B3B6F"/>
                 </a:solidFill>
                 <a:latin typeface="Amiri" pitchFamily="2" charset="-78"/>
+                <a:ea typeface="Amiri" pitchFamily="2" charset="-78"/>
                 <a:cs typeface="Amiri" pitchFamily="2" charset="-78"/>
               </a:rPr>
               <a:t>الوَظِيفَةُ تَتَطَلَّبُ العَمَلَ فِي عُطْلَةِ نِهَايَةِ الأُسْبُوعِ.</a:t>
@@ -6739,6 +6799,7 @@
                   <a:srgbClr val="1B3B6F"/>
                 </a:solidFill>
                 <a:latin typeface="Amiri" pitchFamily="2" charset="-78"/>
+                <a:ea typeface="Amiri" pitchFamily="2" charset="-78"/>
                 <a:cs typeface="Amiri" pitchFamily="2" charset="-78"/>
               </a:rPr>
               <a:t>لَوْ لَمْ أَحْصُلْ …، لَتَطَوَّعْتُ … لِكَيْ …</a:t>
@@ -6815,6 +6876,7 @@
                   <a:srgbClr val="1B3B6F"/>
                 </a:solidFill>
                 <a:latin typeface="Amiri" pitchFamily="2" charset="-78"/>
+                <a:ea typeface="Amiri" pitchFamily="2" charset="-78"/>
                 <a:cs typeface="Amiri" pitchFamily="2" charset="-78"/>
               </a:rPr>
               <a:t>لَوْ لَمْ تَحْصُلْ عَلَى الوَظِيفَةِ، مَاذَا سَتَفْعَلُ؟</a:t>
@@ -7024,6 +7086,7 @@
                   <a:srgbClr val="D4AF37"/>
                 </a:solidFill>
                 <a:latin typeface="Amiri" pitchFamily="2" charset="-78"/>
+                <a:ea typeface="Amiri" pitchFamily="2" charset="-78"/>
                 <a:cs typeface="Amiri" pitchFamily="2" charset="-78"/>
               </a:rPr>
               <a:t>م</a:t>
@@ -7344,6 +7407,7 @@
                   <a:srgbClr val="8A6D1E"/>
                 </a:solidFill>
                 <a:latin typeface="Amiri" pitchFamily="2" charset="-78"/>
+                <a:ea typeface="Amiri" pitchFamily="2" charset="-78"/>
                 <a:cs typeface="Amiri" pitchFamily="2" charset="-78"/>
               </a:rPr>
               <a:t>وَرَقَةُ المُلَاحِظِ</a:t>
@@ -8814,6 +8878,7 @@
                   <a:srgbClr val="D4AF37"/>
                 </a:solidFill>
                 <a:latin typeface="Amiri" pitchFamily="2" charset="-78"/>
+                <a:ea typeface="Amiri" pitchFamily="2" charset="-78"/>
                 <a:cs typeface="Amiri" pitchFamily="2" charset="-78"/>
               </a:rPr>
               <a:t>م</a:t>
@@ -9134,6 +9199,7 @@
                   <a:srgbClr val="8A6D1E"/>
                 </a:solidFill>
                 <a:latin typeface="Amiri" pitchFamily="2" charset="-78"/>
+                <a:ea typeface="Amiri" pitchFamily="2" charset="-78"/>
                 <a:cs typeface="Amiri" pitchFamily="2" charset="-78"/>
               </a:rPr>
               <a:t>نَمُوذَجُ الإِجَابَةِ</a:t>
@@ -9376,6 +9442,7 @@
                   <a:srgbClr val="1B3B6F"/>
                 </a:solidFill>
                 <a:latin typeface="Amiri" pitchFamily="2" charset="-78"/>
+                <a:ea typeface="Amiri" pitchFamily="2" charset="-78"/>
                 <a:cs typeface="Amiri" pitchFamily="2" charset="-78"/>
               </a:rPr>
               <a:t>أُرِيدُ أَنْ أَدْرُسَ اللُّغَةَ العَرَبِيَّةَ، مِنْ فَضْلِكَ.</a:t>
@@ -9452,6 +9519,7 @@
                   <a:srgbClr val="1B3B6F"/>
                 </a:solidFill>
                 <a:latin typeface="Amiri" pitchFamily="2" charset="-78"/>
+                <a:ea typeface="Amiri" pitchFamily="2" charset="-78"/>
                 <a:cs typeface="Amiri" pitchFamily="2" charset="-78"/>
               </a:rPr>
               <a:t>أَهْلًا وَسَهْلًا! مَاذَا تُرِيدُ أَنْ تَدْرُسَ؟</a:t>
@@ -9555,6 +9623,7 @@
                   <a:srgbClr val="1B3B6F"/>
                 </a:solidFill>
                 <a:latin typeface="Amiri" pitchFamily="2" charset="-78"/>
+                <a:ea typeface="Amiri" pitchFamily="2" charset="-78"/>
                 <a:cs typeface="Amiri" pitchFamily="2" charset="-78"/>
               </a:rPr>
               <a:t>أَنَا فِي المَرْحَلَةِ الثَّانَوِيَّةِ، فِي الصَّفِّ العَاشِرِ.</a:t>
@@ -9631,6 +9700,7 @@
                   <a:srgbClr val="1B3B6F"/>
                 </a:solidFill>
                 <a:latin typeface="Amiri" pitchFamily="2" charset="-78"/>
+                <a:ea typeface="Amiri" pitchFamily="2" charset="-78"/>
                 <a:cs typeface="Amiri" pitchFamily="2" charset="-78"/>
               </a:rPr>
               <a:t>فِي أَيِّ مَرْحَلَةٍ تَدْرُسُ الآنَ؟</a:t>
@@ -9734,6 +9804,7 @@
                   <a:srgbClr val="1B3B6F"/>
                 </a:solidFill>
                 <a:latin typeface="Amiri" pitchFamily="2" charset="-78"/>
+                <a:ea typeface="Amiri" pitchFamily="2" charset="-78"/>
                 <a:cs typeface="Amiri" pitchFamily="2" charset="-78"/>
               </a:rPr>
               <a:t>أُفَضِّلُ صَفَّ يَوْمِ السَّبْتِ، لِأَنِّي مَشْغُولٌ فِي المَسَاءِ.</a:t>
@@ -9810,6 +9881,7 @@
                   <a:srgbClr val="1B3B6F"/>
                 </a:solidFill>
                 <a:latin typeface="Amiri" pitchFamily="2" charset="-78"/>
+                <a:ea typeface="Amiri" pitchFamily="2" charset="-78"/>
                 <a:cs typeface="Amiri" pitchFamily="2" charset="-78"/>
               </a:rPr>
               <a:t>عِنْدَنَا صَفٌّ مَسَائِيٌّ وَصَفٌّ يَوْمَ السَّبْتِ.</a:t>
@@ -9913,6 +9985,7 @@
                   <a:srgbClr val="1B3B6F"/>
                 </a:solidFill>
                 <a:latin typeface="Amiri" pitchFamily="2" charset="-78"/>
+                <a:ea typeface="Amiri" pitchFamily="2" charset="-78"/>
                 <a:cs typeface="Amiri" pitchFamily="2" charset="-78"/>
               </a:rPr>
               <a:t>مَتَى تَبْدَأُ الحِصَّةُ؟</a:t>
@@ -9989,6 +10062,7 @@
                   <a:srgbClr val="1B3B6F"/>
                 </a:solidFill>
                 <a:latin typeface="Amiri" pitchFamily="2" charset="-78"/>
+                <a:ea typeface="Amiri" pitchFamily="2" charset="-78"/>
                 <a:cs typeface="Amiri" pitchFamily="2" charset="-78"/>
               </a:rPr>
               <a:t>مُمْتَازٌ. هَلْ عِنْدَكَ سُؤَالٌ؟</a:t>
@@ -10092,6 +10166,7 @@
                   <a:srgbClr val="1B3B6F"/>
                 </a:solidFill>
                 <a:latin typeface="Amiri" pitchFamily="2" charset="-78"/>
+                <a:ea typeface="Amiri" pitchFamily="2" charset="-78"/>
                 <a:cs typeface="Amiri" pitchFamily="2" charset="-78"/>
               </a:rPr>
               <a:t>أَحْتَاجُ إِلَى دَفْتَرٍ وَقَامُوسٍ.</a:t>
@@ -10168,6 +10243,7 @@
                   <a:srgbClr val="1B3B6F"/>
                 </a:solidFill>
                 <a:latin typeface="Amiri" pitchFamily="2" charset="-78"/>
+                <a:ea typeface="Amiri" pitchFamily="2" charset="-78"/>
                 <a:cs typeface="Amiri" pitchFamily="2" charset="-78"/>
               </a:rPr>
               <a:t>فِي العَاشِرَةِ. مَاذَا تَحْتَاجُ لِلصَّفِّ؟</a:t>
@@ -10377,6 +10453,7 @@
                   <a:srgbClr val="D4AF37"/>
                 </a:solidFill>
                 <a:latin typeface="Amiri" pitchFamily="2" charset="-78"/>
+                <a:ea typeface="Amiri" pitchFamily="2" charset="-78"/>
                 <a:cs typeface="Amiri" pitchFamily="2" charset="-78"/>
               </a:rPr>
               <a:t>م</a:t>
@@ -10697,6 +10774,7 @@
                   <a:srgbClr val="8A6D1E"/>
                 </a:solidFill>
                 <a:latin typeface="Amiri" pitchFamily="2" charset="-78"/>
+                <a:ea typeface="Amiri" pitchFamily="2" charset="-78"/>
                 <a:cs typeface="Amiri" pitchFamily="2" charset="-78"/>
               </a:rPr>
               <a:t>نَمُوذَجُ الإِجَابَةِ</a:t>
@@ -10939,6 +11017,7 @@
                   <a:srgbClr val="1B3B6F"/>
                 </a:solidFill>
                 <a:latin typeface="Amiri" pitchFamily="2" charset="-78"/>
+                <a:ea typeface="Amiri" pitchFamily="2" charset="-78"/>
                 <a:cs typeface="Amiri" pitchFamily="2" charset="-78"/>
               </a:rPr>
               <a:t>رَأَيْتُ إِعْلَانًا عَنْ عَمَلٍ جُزْئِيٍّ، وَأَوَدُّ أَنْ أَتَقَدَّمَ لَهُ.</a:t>
@@ -11015,6 +11094,7 @@
                   <a:srgbClr val="1B3B6F"/>
                 </a:solidFill>
                 <a:latin typeface="Amiri" pitchFamily="2" charset="-78"/>
+                <a:ea typeface="Amiri" pitchFamily="2" charset="-78"/>
                 <a:cs typeface="Amiri" pitchFamily="2" charset="-78"/>
               </a:rPr>
               <a:t>مَقْهَى الوَاحَةِ، تَفَضَّلْ.</a:t>
@@ -11118,6 +11198,7 @@
                   <a:srgbClr val="1B3B6F"/>
                 </a:solidFill>
                 <a:latin typeface="Amiri" pitchFamily="2" charset="-78"/>
+                <a:ea typeface="Amiri" pitchFamily="2" charset="-78"/>
                 <a:cs typeface="Amiri" pitchFamily="2" charset="-78"/>
               </a:rPr>
               <a:t>نَعَمْ، كُنْتُ أَعْمَلُ فِي مَطْعَمِ عَمِّي فِي العُطَلِ.</a:t>
@@ -11194,6 +11275,7 @@
                   <a:srgbClr val="1B3B6F"/>
                 </a:solidFill>
                 <a:latin typeface="Amiri" pitchFamily="2" charset="-78"/>
+                <a:ea typeface="Amiri" pitchFamily="2" charset="-78"/>
                 <a:cs typeface="Amiri" pitchFamily="2" charset="-78"/>
               </a:rPr>
               <a:t>هَلْ عَمِلْتَ فِي مَقْهًى مِنْ قَبْلُ؟</a:t>
@@ -11297,6 +11379,7 @@
                   <a:srgbClr val="1B3B6F"/>
                 </a:solidFill>
                 <a:latin typeface="Amiri" pitchFamily="2" charset="-78"/>
+                <a:ea typeface="Amiri" pitchFamily="2" charset="-78"/>
                 <a:cs typeface="Amiri" pitchFamily="2" charset="-78"/>
               </a:rPr>
               <a:t>أَنَا نَشِيطٌ وَمُهَذَّبٌ؛ مَثَلًا، أَبْتَسِمُ دَائِمًا لِلزَّبَائِنِ حَتَّى عِنْدَمَا يَكُونُ المَطْعَمُ مُزْدَحِمًا.</a:t>
@@ -11373,6 +11456,7 @@
                   <a:srgbClr val="1B3B6F"/>
                 </a:solidFill>
                 <a:latin typeface="Amiri" pitchFamily="2" charset="-78"/>
+                <a:ea typeface="Amiri" pitchFamily="2" charset="-78"/>
                 <a:cs typeface="Amiri" pitchFamily="2" charset="-78"/>
               </a:rPr>
               <a:t>مَا صِفَاتُكَ الشَّخْصِيَّةُ؟</a:t>
@@ -11476,6 +11560,7 @@
                   <a:srgbClr val="1B3B6F"/>
                 </a:solidFill>
                 <a:latin typeface="Amiri" pitchFamily="2" charset="-78"/>
+                <a:ea typeface="Amiri" pitchFamily="2" charset="-78"/>
                 <a:cs typeface="Amiri" pitchFamily="2" charset="-78"/>
               </a:rPr>
               <a:t>كَمِ الرَّاتِبُ فِي السَّاعَةِ؟ وَهَلْ هُنَاكَ زِيٌّ خَاصٌّ؟</a:t>
@@ -11552,6 +11637,7 @@
                   <a:srgbClr val="1B3B6F"/>
                 </a:solidFill>
                 <a:latin typeface="Amiri" pitchFamily="2" charset="-78"/>
+                <a:ea typeface="Amiri" pitchFamily="2" charset="-78"/>
                 <a:cs typeface="Amiri" pitchFamily="2" charset="-78"/>
               </a:rPr>
               <a:t>العَمَلُ يَوْمَ الجُمُعَةِ مِنَ الرَّابِعَةِ إِلَى التَّاسِعَةِ.</a:t>
@@ -11655,6 +11741,7 @@
                   <a:srgbClr val="1B3B6F"/>
                 </a:solidFill>
                 <a:latin typeface="Amiri" pitchFamily="2" charset="-78"/>
+                <a:ea typeface="Amiri" pitchFamily="2" charset="-78"/>
                 <a:cs typeface="Amiri" pitchFamily="2" charset="-78"/>
               </a:rPr>
               <a:t>سَأُرَاجِعُ دُرُوسِي يَوْمَ السَّبْتِ صَبَاحًا، وَلَنْ أَعْمَلَ أَكْثَرَ مِنْ خَمْسِ سَاعَاتٍ فِي الأُسْبُوعِ.</a:t>
@@ -11731,6 +11818,7 @@
                   <a:srgbClr val="1B3B6F"/>
                 </a:solidFill>
                 <a:latin typeface="Amiri" pitchFamily="2" charset="-78"/>
+                <a:ea typeface="Amiri" pitchFamily="2" charset="-78"/>
                 <a:cs typeface="Amiri" pitchFamily="2" charset="-78"/>
               </a:rPr>
               <a:t>وَكَيْفَ سَتُوَفِّقُ بَيْنَ العَمَلِ وَالدِّرَاسَةِ؟</a:t>
@@ -11940,6 +12028,7 @@
                   <a:srgbClr val="D4AF37"/>
                 </a:solidFill>
                 <a:latin typeface="Amiri" pitchFamily="2" charset="-78"/>
+                <a:ea typeface="Amiri" pitchFamily="2" charset="-78"/>
                 <a:cs typeface="Amiri" pitchFamily="2" charset="-78"/>
               </a:rPr>
               <a:t>م</a:t>
@@ -12260,6 +12349,7 @@
                   <a:srgbClr val="8A6D1E"/>
                 </a:solidFill>
                 <a:latin typeface="Amiri" pitchFamily="2" charset="-78"/>
+                <a:ea typeface="Amiri" pitchFamily="2" charset="-78"/>
                 <a:cs typeface="Amiri" pitchFamily="2" charset="-78"/>
               </a:rPr>
               <a:t>نَمُوذَجُ الإِجَابَةِ</a:t>
@@ -12502,6 +12592,7 @@
                   <a:srgbClr val="1B3B6F"/>
                 </a:solidFill>
                 <a:latin typeface="Amiri" pitchFamily="2" charset="-78"/>
+                <a:ea typeface="Amiri" pitchFamily="2" charset="-78"/>
                 <a:cs typeface="Amiri" pitchFamily="2" charset="-78"/>
               </a:rPr>
               <a:t>شُكْرًا! نَجَحْتُ فِي كُلِّ المَوَادِّ، وَكَانَتْ نَتِيجَةُ الرِّيَاضِيَّاتِ أَفْضَلَ مِنْ نَتِيجَةِ الامْتِحَانِ التَّجْرِيبِيِّ بِكَثِيرٍ.</a:t>
@@ -12578,6 +12669,7 @@
                   <a:srgbClr val="1B3B6F"/>
                 </a:solidFill>
                 <a:latin typeface="Amiri" pitchFamily="2" charset="-78"/>
+                <a:ea typeface="Amiri" pitchFamily="2" charset="-78"/>
                 <a:cs typeface="Amiri" pitchFamily="2" charset="-78"/>
               </a:rPr>
               <a:t>مَبْرُوكٌ عَلَى النَّتَائِجِ! كَيْفَ كَانَتْ؟</a:t>
@@ -12681,6 +12773,7 @@
                   <a:srgbClr val="1B3B6F"/>
                 </a:solidFill>
                 <a:latin typeface="Amiri" pitchFamily="2" charset="-78"/>
+                <a:ea typeface="Amiri" pitchFamily="2" charset="-78"/>
                 <a:cs typeface="Amiri" pitchFamily="2" charset="-78"/>
               </a:rPr>
               <a:t>أَوَّلًا، وَضَعْتُ جَدْوَلًا لِلْمُرَاجَعَةِ، ثُمَّ حَلَلْتُ امْتِحَانَاتٍ سَابِقَةً؛ بِالإِضَافَةِ إِلَى ذٰلِكَ، كُنْتُ أُرَاجِعُ مَعَ صَدِيقٍ كُلَّ يَوْمِ أَحَدٍ.</a:t>
@@ -12757,6 +12850,7 @@
                   <a:srgbClr val="1B3B6F"/>
                 </a:solidFill>
                 <a:latin typeface="Amiri" pitchFamily="2" charset="-78"/>
+                <a:ea typeface="Amiri" pitchFamily="2" charset="-78"/>
                 <a:cs typeface="Amiri" pitchFamily="2" charset="-78"/>
               </a:rPr>
               <a:t>مَا السِّرُّ؟ كَيْفَ رَاجَعْتَ؟</a:t>
@@ -12860,6 +12954,7 @@
                   <a:srgbClr val="1B3B6F"/>
                 </a:solidFill>
                 <a:latin typeface="Amiri" pitchFamily="2" charset="-78"/>
+                <a:ea typeface="Amiri" pitchFamily="2" charset="-78"/>
                 <a:cs typeface="Amiri" pitchFamily="2" charset="-78"/>
               </a:rPr>
               <a:t>أُرِيدُ دِرَاسَةَ التَّصْمِيمِ وَالتِّكْنُولُوجْيَا، لِأَنَّنِي أُحِبُّ صِنَاعَةَ الأَشْيَاءِ بِيَدَيَّ.</a:t>
@@ -12936,6 +13031,7 @@
                   <a:srgbClr val="1B3B6F"/>
                 </a:solidFill>
                 <a:latin typeface="Amiri" pitchFamily="2" charset="-78"/>
+                <a:ea typeface="Amiri" pitchFamily="2" charset="-78"/>
                 <a:cs typeface="Amiri" pitchFamily="2" charset="-78"/>
               </a:rPr>
               <a:t>مَاذَا تُرِيدُ أَنْ تَدْرُسَ بَعْدَ ذٰلِكَ؟</a:t>
@@ -13039,6 +13135,7 @@
                   <a:srgbClr val="1B3B6F"/>
                 </a:solidFill>
                 <a:latin typeface="Amiri" pitchFamily="2" charset="-78"/>
+                <a:ea typeface="Amiri" pitchFamily="2" charset="-78"/>
                 <a:cs typeface="Amiri" pitchFamily="2" charset="-78"/>
               </a:rPr>
               <a:t>الدَّوْرَةُ المِهْنِيَّةُ عَمَلِيَّةٌ أَكْثَرَ، أَمَّا المَسَارُ الأَكَادِيمِيُّ فَيَفْتَحُ بَابَ الجَامِعَةِ؛ لِذٰلِكَ سَأَخْتَارُ المَسَارَ الأَكَادِيمِيَّ.</a:t>
@@ -13115,6 +13212,7 @@
                   <a:srgbClr val="1B3B6F"/>
                 </a:solidFill>
                 <a:latin typeface="Amiri" pitchFamily="2" charset="-78"/>
+                <a:ea typeface="Amiri" pitchFamily="2" charset="-78"/>
                 <a:cs typeface="Amiri" pitchFamily="2" charset="-78"/>
               </a:rPr>
               <a:t>هُنَاكَ دَوْرَةٌ مِهْنِيَّةٌ أَوْ مَسَارٌ أَكَادِيمِيٌّ.</a:t>
@@ -13218,6 +13316,7 @@
                   <a:srgbClr val="1B3B6F"/>
                 </a:solidFill>
                 <a:latin typeface="Amiri" pitchFamily="2" charset="-78"/>
+                <a:ea typeface="Amiri" pitchFamily="2" charset="-78"/>
                 <a:cs typeface="Amiri" pitchFamily="2" charset="-78"/>
               </a:rPr>
               <a:t>إِذَا تَغَيَّرَ رَأْيِي، فَسَوْفَ أَنْتَقِلُ إِلَى الدَّوْرَةِ المِهْنِيَّةِ، وَمَعَ ذٰلِكَ لَنْ أَنْدَمَ عَلَى التَّجْرِبَةِ.</a:t>
@@ -13294,6 +13393,7 @@
                   <a:srgbClr val="1B3B6F"/>
                 </a:solidFill>
                 <a:latin typeface="Amiri" pitchFamily="2" charset="-78"/>
+                <a:ea typeface="Amiri" pitchFamily="2" charset="-78"/>
                 <a:cs typeface="Amiri" pitchFamily="2" charset="-78"/>
               </a:rPr>
               <a:t>وَإِذَا تَغَيَّرَ رَأْيُكَ بَعْدَ سَنَةٍ؟</a:t>
@@ -13503,6 +13603,7 @@
                   <a:srgbClr val="D4AF37"/>
                 </a:solidFill>
                 <a:latin typeface="Amiri" pitchFamily="2" charset="-78"/>
+                <a:ea typeface="Amiri" pitchFamily="2" charset="-78"/>
                 <a:cs typeface="Amiri" pitchFamily="2" charset="-78"/>
               </a:rPr>
               <a:t>م</a:t>
@@ -13823,6 +13924,7 @@
                   <a:srgbClr val="8A6D1E"/>
                 </a:solidFill>
                 <a:latin typeface="Amiri" pitchFamily="2" charset="-78"/>
+                <a:ea typeface="Amiri" pitchFamily="2" charset="-78"/>
                 <a:cs typeface="Amiri" pitchFamily="2" charset="-78"/>
               </a:rPr>
               <a:t>نَمُوذَجُ الإِجَابَةِ</a:t>
@@ -14065,6 +14167,7 @@
                   <a:srgbClr val="1B3B6F"/>
                 </a:solidFill>
                 <a:latin typeface="Amiri" pitchFamily="2" charset="-78"/>
+                <a:ea typeface="Amiri" pitchFamily="2" charset="-78"/>
                 <a:cs typeface="Amiri" pitchFamily="2" charset="-78"/>
               </a:rPr>
               <a:t>يَسُرُّنِي أَنْ أَكُونَ هُنَا. فَقَدْ أَحْبَبْتُ التَّارِيخَ مُنْذُ طُفُولَتِي، وَأَرَى أَنَّ المَتْحَفَ أَفْضَلُ مَكَانٍ لِأَنْقُلَ هٰذَا الحُبَّ إِلَى الأَطْفَالِ.</a:t>
@@ -14141,6 +14244,7 @@
                   <a:srgbClr val="1B3B6F"/>
                 </a:solidFill>
                 <a:latin typeface="Amiri" pitchFamily="2" charset="-78"/>
+                <a:ea typeface="Amiri" pitchFamily="2" charset="-78"/>
                 <a:cs typeface="Amiri" pitchFamily="2" charset="-78"/>
               </a:rPr>
               <a:t>لِمَاذَا تَقَدَّمْتَ لِهٰذِهِ الوَظِيفَةِ؟</a:t>
@@ -14247,6 +14351,7 @@
                   <a:srgbClr val="1B3B6F"/>
                 </a:solidFill>
                 <a:latin typeface="Amiri" pitchFamily="2" charset="-78"/>
+                <a:ea typeface="Amiri" pitchFamily="2" charset="-78"/>
                 <a:cs typeface="Amiri" pitchFamily="2" charset="-78"/>
               </a:rPr>
               <a:t>فِي الصَّيْفِ المَاضِي كُنْتُ مُشْرِفًا فِي مُخَيَّمٍ لِلْأَطْفَالِ، وَكُنْتُ أُنَظِّمُ لَهُمْ أَلْعَابًا تَعْلِيمِيَّةً، فَتَعَلَّمْتُ أَنْ أَشْرَحَ الأَفْكَارَ الصَّعْبَةَ بِطَرِيقَةٍ بَسِيطَةٍ.</a:t>
@@ -14323,6 +14428,7 @@
                   <a:srgbClr val="1B3B6F"/>
                 </a:solidFill>
                 <a:latin typeface="Amiri" pitchFamily="2" charset="-78"/>
+                <a:ea typeface="Amiri" pitchFamily="2" charset="-78"/>
                 <a:cs typeface="Amiri" pitchFamily="2" charset="-78"/>
               </a:rPr>
               <a:t>هَلْ عِنْدَكَ خِبْرَةٌ فِي العَمَلِ مَعَ الأَطْفَالِ؟</a:t>
@@ -14426,6 +14532,7 @@
                   <a:srgbClr val="1B3B6F"/>
                 </a:solidFill>
                 <a:latin typeface="Amiri" pitchFamily="2" charset="-78"/>
+                <a:ea typeface="Amiri" pitchFamily="2" charset="-78"/>
                 <a:cs typeface="Amiri" pitchFamily="2" charset="-78"/>
               </a:rPr>
               <a:t>كُنْتُ أَخْجَلُ مِنَ الكَلَامِ أَمَامَ الجُمْهُورِ، أَمَّا الآنَ فَأَتَدَرَّبُ فِي نَادِي المُنَاظَرَاتِ، وَقَدْ أَصْبَحْتُ أَكْثَرَ ثِقَةً.</a:t>
@@ -14502,6 +14609,7 @@
                   <a:srgbClr val="1B3B6F"/>
                 </a:solidFill>
                 <a:latin typeface="Amiri" pitchFamily="2" charset="-78"/>
+                <a:ea typeface="Amiri" pitchFamily="2" charset="-78"/>
                 <a:cs typeface="Amiri" pitchFamily="2" charset="-78"/>
               </a:rPr>
               <a:t>مَا نُقْطَةُ ضَعْفِكَ؟</a:t>
@@ -14605,6 +14713,7 @@
                   <a:srgbClr val="1B3B6F"/>
                 </a:solidFill>
                 <a:latin typeface="Amiri" pitchFamily="2" charset="-78"/>
+                <a:ea typeface="Amiri" pitchFamily="2" charset="-78"/>
                 <a:cs typeface="Amiri" pitchFamily="2" charset="-78"/>
               </a:rPr>
               <a:t>صَحِيحٌ أَنَّ ذٰلِكَ سَيَأْخُذُ مِنْ وَقْتِ رَاحَتِي، غَيْرَ أَنَّ الخِبْرَةَ أَهَمُّ عِنْدِي؛ وَالدَّلِيلُ أَنَّنِي عَمِلْتُ فِي العُطَلِ سَنَتَيْنِ مُتَتَالِيَتَيْنِ.</a:t>
@@ -14681,6 +14790,7 @@
                   <a:srgbClr val="1B3B6F"/>
                 </a:solidFill>
                 <a:latin typeface="Amiri" pitchFamily="2" charset="-78"/>
+                <a:ea typeface="Amiri" pitchFamily="2" charset="-78"/>
                 <a:cs typeface="Amiri" pitchFamily="2" charset="-78"/>
               </a:rPr>
               <a:t>الوَظِيفَةُ تَتَطَلَّبُ العَمَلَ فِي عُطْلَةِ نِهَايَةِ الأُسْبُوعِ.</a:t>
@@ -14784,6 +14894,7 @@
                   <a:srgbClr val="1B3B6F"/>
                 </a:solidFill>
                 <a:latin typeface="Amiri" pitchFamily="2" charset="-78"/>
+                <a:ea typeface="Amiri" pitchFamily="2" charset="-78"/>
                 <a:cs typeface="Amiri" pitchFamily="2" charset="-78"/>
               </a:rPr>
               <a:t>لَوْ لَمْ أَحْصُلْ عَلَيْهَا، لَتَطَوَّعْتُ فِي المَتْحَفِ يَوْمًا فِي الأُسْبُوعِ، لِكَيْ أَبْقَى قَرِيبًا مِنَ المَجَالِ الَّذِي أُحِبُّهُ.</a:t>
@@ -14860,6 +14971,7 @@
                   <a:srgbClr val="1B3B6F"/>
                 </a:solidFill>
                 <a:latin typeface="Amiri" pitchFamily="2" charset="-78"/>
+                <a:ea typeface="Amiri" pitchFamily="2" charset="-78"/>
                 <a:cs typeface="Amiri" pitchFamily="2" charset="-78"/>
               </a:rPr>
               <a:t>لَوْ لَمْ تَحْصُلْ عَلَى الوَظِيفَةِ، مَاذَا سَتَفْعَلُ؟</a:t>
@@ -15069,6 +15181,7 @@
                   <a:srgbClr val="D4AF37"/>
                 </a:solidFill>
                 <a:latin typeface="Amiri" pitchFamily="2" charset="-78"/>
+                <a:ea typeface="Amiri" pitchFamily="2" charset="-78"/>
                 <a:cs typeface="Amiri" pitchFamily="2" charset="-78"/>
               </a:rPr>
               <a:t>م</a:t>
@@ -15389,6 +15502,7 @@
                   <a:srgbClr val="8A6D1E"/>
                 </a:solidFill>
                 <a:latin typeface="Amiri" pitchFamily="2" charset="-78"/>
+                <a:ea typeface="Amiri" pitchFamily="2" charset="-78"/>
                 <a:cs typeface="Amiri" pitchFamily="2" charset="-78"/>
               </a:rPr>
               <a:t>مَدْرَسَتِي وَعَمَلِي</a:t>
@@ -15669,6 +15783,7 @@
                   <a:srgbClr val="1B3B6F"/>
                 </a:solidFill>
                 <a:latin typeface="Amiri" pitchFamily="2" charset="-78"/>
+                <a:ea typeface="Amiri" pitchFamily="2" charset="-78"/>
                 <a:cs typeface="Amiri" pitchFamily="2" charset="-78"/>
               </a:rPr>
               <a:t>أَدْرُسُ فِي مَدْرَسَةِ …</a:t>
@@ -15745,6 +15860,7 @@
                   <a:srgbClr val="1B3B6F"/>
                 </a:solidFill>
                 <a:latin typeface="Amiri" pitchFamily="2" charset="-78"/>
+                <a:ea typeface="Amiri" pitchFamily="2" charset="-78"/>
                 <a:cs typeface="Amiri" pitchFamily="2" charset="-78"/>
               </a:rPr>
               <a:t>فِي أَيِّ مَدْرَسَةٍ تَدْرُسُ؟</a:t>
@@ -15913,6 +16029,7 @@
                   <a:srgbClr val="1B3B6F"/>
                 </a:solidFill>
                 <a:latin typeface="Amiri" pitchFamily="2" charset="-78"/>
+                <a:ea typeface="Amiri" pitchFamily="2" charset="-78"/>
                 <a:cs typeface="Amiri" pitchFamily="2" charset="-78"/>
               </a:rPr>
               <a:t>يَبْدَأُ فِي …</a:t>
@@ -15989,6 +16106,7 @@
                   <a:srgbClr val="1B3B6F"/>
                 </a:solidFill>
                 <a:latin typeface="Amiri" pitchFamily="2" charset="-78"/>
+                <a:ea typeface="Amiri" pitchFamily="2" charset="-78"/>
                 <a:cs typeface="Amiri" pitchFamily="2" charset="-78"/>
               </a:rPr>
               <a:t>مَتَى يَبْدَأُ يَوْمُكَ الدِّرَاسِيُّ؟</a:t>
@@ -16157,6 +16275,7 @@
                   <a:srgbClr val="1B3B6F"/>
                 </a:solidFill>
                 <a:latin typeface="Amiri" pitchFamily="2" charset="-78"/>
+                <a:ea typeface="Amiri" pitchFamily="2" charset="-78"/>
                 <a:cs typeface="Amiri" pitchFamily="2" charset="-78"/>
               </a:rPr>
               <a:t>أَحْمِلُ … وَ…</a:t>
@@ -16233,6 +16352,7 @@
                   <a:srgbClr val="1B3B6F"/>
                 </a:solidFill>
                 <a:latin typeface="Amiri" pitchFamily="2" charset="-78"/>
+                <a:ea typeface="Amiri" pitchFamily="2" charset="-78"/>
                 <a:cs typeface="Amiri" pitchFamily="2" charset="-78"/>
               </a:rPr>
               <a:t>مَاذَا تَحْمِلُ فِي حَقِيبَتِكَ؟</a:t>
@@ -16401,6 +16521,7 @@
                   <a:srgbClr val="1B3B6F"/>
                 </a:solidFill>
                 <a:latin typeface="Amiri" pitchFamily="2" charset="-78"/>
+                <a:ea typeface="Amiri" pitchFamily="2" charset="-78"/>
                 <a:cs typeface="Amiri" pitchFamily="2" charset="-78"/>
               </a:rPr>
               <a:t>يَجِبُ أَنْ يَكُونَ …</a:t>
@@ -16477,6 +16598,7 @@
                   <a:srgbClr val="1B3B6F"/>
                 </a:solidFill>
                 <a:latin typeface="Amiri" pitchFamily="2" charset="-78"/>
+                <a:ea typeface="Amiri" pitchFamily="2" charset="-78"/>
                 <a:cs typeface="Amiri" pitchFamily="2" charset="-78"/>
               </a:rPr>
               <a:t>مَا الصِّفَاتُ المُهِمَّةُ لِلْمُعَلِّمِ؟</a:t>
@@ -16645,6 +16767,7 @@
                   <a:srgbClr val="1B3B6F"/>
                 </a:solidFill>
                 <a:latin typeface="Amiri" pitchFamily="2" charset="-78"/>
+                <a:ea typeface="Amiri" pitchFamily="2" charset="-78"/>
                 <a:cs typeface="Amiri" pitchFamily="2" charset="-78"/>
               </a:rPr>
               <a:t>أُرِيدُ أَنْ أَكُونَ … لِأَنَّ …</a:t>
@@ -16721,6 +16844,7 @@
                   <a:srgbClr val="1B3B6F"/>
                 </a:solidFill>
                 <a:latin typeface="Amiri" pitchFamily="2" charset="-78"/>
+                <a:ea typeface="Amiri" pitchFamily="2" charset="-78"/>
                 <a:cs typeface="Amiri" pitchFamily="2" charset="-78"/>
               </a:rPr>
               <a:t>مَا الوَظِيفَةُ الَّتِي تُرِيدُهَا؟</a:t>
@@ -16875,6 +16999,7 @@
                   <a:srgbClr val="1B3B6F"/>
                 </a:solidFill>
                 <a:latin typeface="Amiri" pitchFamily="2" charset="-78"/>
+                <a:ea typeface="Amiri" pitchFamily="2" charset="-78"/>
                 <a:cs typeface="Amiri" pitchFamily="2" charset="-78"/>
               </a:rPr>
               <a:t>عَفْوًا، هَلْ يُمْكِنُ أَنْ تُعِيدَ السُّؤَالَ؟</a:t>
@@ -17008,6 +17133,7 @@
                   <a:srgbClr val="D4AF37"/>
                 </a:solidFill>
                 <a:latin typeface="Amiri" pitchFamily="2" charset="-78"/>
+                <a:ea typeface="Amiri" pitchFamily="2" charset="-78"/>
                 <a:cs typeface="Amiri" pitchFamily="2" charset="-78"/>
               </a:rPr>
               <a:t>م</a:t>
@@ -17328,6 +17454,7 @@
                   <a:srgbClr val="8A6D1E"/>
                 </a:solidFill>
                 <a:latin typeface="Amiri" pitchFamily="2" charset="-78"/>
+                <a:ea typeface="Amiri" pitchFamily="2" charset="-78"/>
                 <a:cs typeface="Amiri" pitchFamily="2" charset="-78"/>
               </a:rPr>
               <a:t>أَنَا وَدِرَاسَتِي وَمُسْتَقْبَلِي</a:t>
@@ -17608,6 +17735,7 @@
                   <a:srgbClr val="1B3B6F"/>
                 </a:solidFill>
                 <a:latin typeface="Amiri" pitchFamily="2" charset="-78"/>
+                <a:ea typeface="Amiri" pitchFamily="2" charset="-78"/>
                 <a:cs typeface="Amiri" pitchFamily="2" charset="-78"/>
               </a:rPr>
               <a:t>كَانَتِ الابْتِدَائِيَّةُ … أَمَّا الثَّانَوِيَّةُ فَأَكْبَرُ …</a:t>
@@ -17684,6 +17812,7 @@
                   <a:srgbClr val="1B3B6F"/>
                 </a:solidFill>
                 <a:latin typeface="Amiri" pitchFamily="2" charset="-78"/>
+                <a:ea typeface="Amiri" pitchFamily="2" charset="-78"/>
                 <a:cs typeface="Amiri" pitchFamily="2" charset="-78"/>
               </a:rPr>
               <a:t>قَارِنْ بَيْنَ مَدْرَسَتِكَ الابْتِدَائِيَّةِ وَالثَّانَوِيَّةِ.</a:t>
@@ -17787,6 +17916,7 @@
                   <a:srgbClr val="1B3B6F"/>
                 </a:solidFill>
                 <a:latin typeface="Amiri" pitchFamily="2" charset="-78"/>
+                <a:ea typeface="Amiri" pitchFamily="2" charset="-78"/>
                 <a:cs typeface="Amiri" pitchFamily="2" charset="-78"/>
               </a:rPr>
               <a:t>رَاجِعْ … وَلَا تَسْهَرْ … لِأَنَّ …</a:t>
@@ -17863,6 +17993,7 @@
                   <a:srgbClr val="1B3B6F"/>
                 </a:solidFill>
                 <a:latin typeface="Amiri" pitchFamily="2" charset="-78"/>
+                <a:ea typeface="Amiri" pitchFamily="2" charset="-78"/>
                 <a:cs typeface="Amiri" pitchFamily="2" charset="-78"/>
               </a:rPr>
               <a:t>مَا نَصِيحَتُكَ لِطَالِبٍ قَبْلَ الامْتِحَانَاتِ؟</a:t>
@@ -17966,6 +18097,7 @@
                   <a:srgbClr val="1B3B6F"/>
                 </a:solidFill>
                 <a:latin typeface="Amiri" pitchFamily="2" charset="-78"/>
+                <a:ea typeface="Amiri" pitchFamily="2" charset="-78"/>
                 <a:cs typeface="Amiri" pitchFamily="2" charset="-78"/>
               </a:rPr>
               <a:t>عَمِلْتُ / زُرْتُ … كَانَ … وَكَانَ الزُّمَلَاءُ …</a:t>
@@ -18042,6 +18174,7 @@
                   <a:srgbClr val="1B3B6F"/>
                 </a:solidFill>
                 <a:latin typeface="Amiri" pitchFamily="2" charset="-78"/>
+                <a:ea typeface="Amiri" pitchFamily="2" charset="-78"/>
                 <a:cs typeface="Amiri" pitchFamily="2" charset="-78"/>
               </a:rPr>
               <a:t>صِفْ مَكَانَ عَمَلٍ زُرْتَهُ أَوْ عَمِلْتَ فِيهِ.</a:t>
@@ -18145,6 +18278,7 @@
                   <a:srgbClr val="1B3B6F"/>
                 </a:solidFill>
                 <a:latin typeface="Amiri" pitchFamily="2" charset="-78"/>
+                <a:ea typeface="Amiri" pitchFamily="2" charset="-78"/>
                 <a:cs typeface="Amiri" pitchFamily="2" charset="-78"/>
               </a:rPr>
               <a:t>أُرِيدُ أَنْ أَحْصُلَ عَلَى … لِكَيْ …</a:t>
@@ -18221,6 +18355,7 @@
                   <a:srgbClr val="1B3B6F"/>
                 </a:solidFill>
                 <a:latin typeface="Amiri" pitchFamily="2" charset="-78"/>
+                <a:ea typeface="Amiri" pitchFamily="2" charset="-78"/>
                 <a:cs typeface="Amiri" pitchFamily="2" charset="-78"/>
               </a:rPr>
               <a:t>مَا الشَّهَادَاتُ أَوِ الدَّوْرَاتُ الَّتِي تُرِيدُهَا؟</a:t>
@@ -18324,6 +18459,7 @@
                   <a:srgbClr val="1B3B6F"/>
                 </a:solidFill>
                 <a:latin typeface="Amiri" pitchFamily="2" charset="-78"/>
+                <a:ea typeface="Amiri" pitchFamily="2" charset="-78"/>
                 <a:cs typeface="Amiri" pitchFamily="2" charset="-78"/>
               </a:rPr>
               <a:t>أَطْمَحُ إِلَى أَنْ … لِأَنَّ …</a:t>
@@ -18400,6 +18536,7 @@
                   <a:srgbClr val="1B3B6F"/>
                 </a:solidFill>
                 <a:latin typeface="Amiri" pitchFamily="2" charset="-78"/>
+                <a:ea typeface="Amiri" pitchFamily="2" charset="-78"/>
                 <a:cs typeface="Amiri" pitchFamily="2" charset="-78"/>
               </a:rPr>
               <a:t>أَيْنَ تُحِبُّ أَنْ تَعْمَلَ فِي المُسْتَقْبَلِ؟</a:t>
@@ -18609,6 +18746,7 @@
                   <a:srgbClr val="D4AF37"/>
                 </a:solidFill>
                 <a:latin typeface="Amiri" pitchFamily="2" charset="-78"/>
+                <a:ea typeface="Amiri" pitchFamily="2" charset="-78"/>
                 <a:cs typeface="Amiri" pitchFamily="2" charset="-78"/>
               </a:rPr>
               <a:t>م</a:t>
@@ -18929,6 +19067,7 @@
                   <a:srgbClr val="8A6D1E"/>
                 </a:solidFill>
                 <a:latin typeface="Amiri" pitchFamily="2" charset="-78"/>
+                <a:ea typeface="Amiri" pitchFamily="2" charset="-78"/>
                 <a:cs typeface="Amiri" pitchFamily="2" charset="-78"/>
               </a:rPr>
               <a:t>التَّعْلِيمُ وَمُسْتَقْبَلُ العَمَلِ</a:t>
@@ -19209,6 +19348,7 @@
                   <a:srgbClr val="1B3B6F"/>
                 </a:solidFill>
                 <a:latin typeface="Amiri" pitchFamily="2" charset="-78"/>
+                <a:ea typeface="Amiri" pitchFamily="2" charset="-78"/>
                 <a:cs typeface="Amiri" pitchFamily="2" charset="-78"/>
               </a:rPr>
               <a:t>صَحِيحٌ أَنَّ … غَيْرَ أَنَّ …</a:t>
@@ -19285,6 +19425,7 @@
                   <a:srgbClr val="1B3B6F"/>
                 </a:solidFill>
                 <a:latin typeface="Amiri" pitchFamily="2" charset="-78"/>
+                <a:ea typeface="Amiri" pitchFamily="2" charset="-78"/>
                 <a:cs typeface="Amiri" pitchFamily="2" charset="-78"/>
               </a:rPr>
               <a:t>هَلِ الامْتِحَانَاتُ أَفْضَلُ طَرِيقَةٍ لِتَقْيِيمِ الطُّلَّابِ؟</a:t>
@@ -19388,6 +19529,7 @@
                   <a:srgbClr val="1B3B6F"/>
                 </a:solidFill>
                 <a:latin typeface="Amiri" pitchFamily="2" charset="-78"/>
+                <a:ea typeface="Amiri" pitchFamily="2" charset="-78"/>
                 <a:cs typeface="Amiri" pitchFamily="2" charset="-78"/>
               </a:rPr>
               <a:t>سَتَخْتَفِي … مِمَّا …</a:t>
@@ -19464,6 +19606,7 @@
                   <a:srgbClr val="1B3B6F"/>
                 </a:solidFill>
                 <a:latin typeface="Amiri" pitchFamily="2" charset="-78"/>
+                <a:ea typeface="Amiri" pitchFamily="2" charset="-78"/>
                 <a:cs typeface="Amiri" pitchFamily="2" charset="-78"/>
               </a:rPr>
               <a:t>كَيْفَ سَيَتَغَيَّرُ عَالَمُ العَمَلِ بِسَبَبِ التِّكْنُولُوجْيَا؟</a:t>
@@ -19567,6 +19710,7 @@
                   <a:srgbClr val="1B3B6F"/>
                 </a:solidFill>
                 <a:latin typeface="Amiri" pitchFamily="2" charset="-78"/>
+                <a:ea typeface="Amiri" pitchFamily="2" charset="-78"/>
                 <a:cs typeface="Amiri" pitchFamily="2" charset="-78"/>
               </a:rPr>
               <a:t>مِنْ نَاحِيَةٍ … وَمِنْ نَاحِيَةٍ أُخْرَى …</a:t>
@@ -19643,6 +19787,7 @@
                   <a:srgbClr val="1B3B6F"/>
                 </a:solidFill>
                 <a:latin typeface="Amiri" pitchFamily="2" charset="-78"/>
+                <a:ea typeface="Amiri" pitchFamily="2" charset="-78"/>
                 <a:cs typeface="Amiri" pitchFamily="2" charset="-78"/>
               </a:rPr>
               <a:t>هَلِ الرَّاتِبُ أَهَمُّ مِنَ السَّعَادَةِ فِي العَمَلِ؟</a:t>
@@ -19746,6 +19891,7 @@
                   <a:srgbClr val="1B3B6F"/>
                 </a:solidFill>
                 <a:latin typeface="Amiri" pitchFamily="2" charset="-78"/>
+                <a:ea typeface="Amiri" pitchFamily="2" charset="-78"/>
                 <a:cs typeface="Amiri" pitchFamily="2" charset="-78"/>
               </a:rPr>
               <a:t>أَثَّرَتْ فِيَّ / أَثَّرَ فِيَّ … عِنْدَمَا …</a:t>
@@ -19822,6 +19968,7 @@
                   <a:srgbClr val="1B3B6F"/>
                 </a:solidFill>
                 <a:latin typeface="Amiri" pitchFamily="2" charset="-78"/>
+                <a:ea typeface="Amiri" pitchFamily="2" charset="-78"/>
                 <a:cs typeface="Amiri" pitchFamily="2" charset="-78"/>
               </a:rPr>
               <a:t>مَنْ أَثَّرَ فِي اخْتِيَارِكَ لِمِهْنَتِكَ؟</a:t>
@@ -19925,6 +20072,7 @@
                   <a:srgbClr val="1B3B6F"/>
                 </a:solidFill>
                 <a:latin typeface="Amiri" pitchFamily="2" charset="-78"/>
+                <a:ea typeface="Amiri" pitchFamily="2" charset="-78"/>
                 <a:cs typeface="Amiri" pitchFamily="2" charset="-78"/>
               </a:rPr>
               <a:t>لَوْ كُنْتُ …، لَأَضَفْتُ …</a:t>
@@ -20001,6 +20149,7 @@
                   <a:srgbClr val="1B3B6F"/>
                 </a:solidFill>
                 <a:latin typeface="Amiri" pitchFamily="2" charset="-78"/>
+                <a:ea typeface="Amiri" pitchFamily="2" charset="-78"/>
                 <a:cs typeface="Amiri" pitchFamily="2" charset="-78"/>
               </a:rPr>
               <a:t>لَوْ كُنْتَ وَزِيرَ التَّعْلِيمِ، مَاذَا تُغَيِّرُ؟</a:t>
@@ -20210,6 +20359,7 @@
                   <a:srgbClr val="D4AF37"/>
                 </a:solidFill>
                 <a:latin typeface="Amiri" pitchFamily="2" charset="-78"/>
+                <a:ea typeface="Amiri" pitchFamily="2" charset="-78"/>
                 <a:cs typeface="Amiri" pitchFamily="2" charset="-78"/>
               </a:rPr>
               <a:t>م</a:t>
@@ -20530,6 +20680,7 @@
                   <a:srgbClr val="8A6D1E"/>
                 </a:solidFill>
                 <a:latin typeface="Amiri" pitchFamily="2" charset="-78"/>
+                <a:ea typeface="Amiri" pitchFamily="2" charset="-78"/>
                 <a:cs typeface="Amiri" pitchFamily="2" charset="-78"/>
               </a:rPr>
               <a:t>آدَابُ الصَّفِّ</a:t>
@@ -22061,6 +22212,7 @@
                   <a:srgbClr val="D4AF37"/>
                 </a:solidFill>
                 <a:latin typeface="Amiri" pitchFamily="2" charset="-78"/>
+                <a:ea typeface="Amiri" pitchFamily="2" charset="-78"/>
                 <a:cs typeface="Amiri" pitchFamily="2" charset="-78"/>
               </a:rPr>
               <a:t>م</a:t>
@@ -22381,6 +22533,7 @@
                   <a:srgbClr val="8A6D1E"/>
                 </a:solidFill>
                 <a:latin typeface="Amiri" pitchFamily="2" charset="-78"/>
+                <a:ea typeface="Amiri" pitchFamily="2" charset="-78"/>
                 <a:cs typeface="Amiri" pitchFamily="2" charset="-78"/>
               </a:rPr>
               <a:t>نَمُوذَجُ الإِجَابَةِ</a:t>
@@ -22623,6 +22776,7 @@
                   <a:srgbClr val="1B3B6F"/>
                 </a:solidFill>
                 <a:latin typeface="Amiri" pitchFamily="2" charset="-78"/>
+                <a:ea typeface="Amiri" pitchFamily="2" charset="-78"/>
                 <a:cs typeface="Amiri" pitchFamily="2" charset="-78"/>
               </a:rPr>
               <a:t>أَدْرُسُ فِي مَدْرَسَةِ المَدِينَةِ، وَهِيَ مَدْرَسَةٌ كَبِيرَةٌ.</a:t>
@@ -22699,6 +22853,7 @@
                   <a:srgbClr val="1B3B6F"/>
                 </a:solidFill>
                 <a:latin typeface="Amiri" pitchFamily="2" charset="-78"/>
+                <a:ea typeface="Amiri" pitchFamily="2" charset="-78"/>
                 <a:cs typeface="Amiri" pitchFamily="2" charset="-78"/>
               </a:rPr>
               <a:t>فِي أَيِّ مَدْرَسَةٍ تَدْرُسُ؟</a:t>
@@ -22802,6 +22957,7 @@
                   <a:srgbClr val="1B3B6F"/>
                 </a:solidFill>
                 <a:latin typeface="Amiri" pitchFamily="2" charset="-78"/>
+                <a:ea typeface="Amiri" pitchFamily="2" charset="-78"/>
                 <a:cs typeface="Amiri" pitchFamily="2" charset="-78"/>
               </a:rPr>
               <a:t>يَبْدَأُ فِي الثَّامِنَةِ وَالنِّصْفِ، وَيَنْتَهِي فِي الثَّالِثَةِ.</a:t>
@@ -22878,6 +23034,7 @@
                   <a:srgbClr val="1B3B6F"/>
                 </a:solidFill>
                 <a:latin typeface="Amiri" pitchFamily="2" charset="-78"/>
+                <a:ea typeface="Amiri" pitchFamily="2" charset="-78"/>
                 <a:cs typeface="Amiri" pitchFamily="2" charset="-78"/>
               </a:rPr>
               <a:t>مَتَى يَبْدَأُ يَوْمُكَ الدِّرَاسِيُّ؟</a:t>
@@ -22981,6 +23138,7 @@
                   <a:srgbClr val="1B3B6F"/>
                 </a:solidFill>
                 <a:latin typeface="Amiri" pitchFamily="2" charset="-78"/>
+                <a:ea typeface="Amiri" pitchFamily="2" charset="-78"/>
                 <a:cs typeface="Amiri" pitchFamily="2" charset="-78"/>
               </a:rPr>
               <a:t>أَحْمِلُ كُتُبِي وَمِقْلَمَتِي وَآلَةً حَاسِبَةً.</a:t>
@@ -23057,6 +23215,7 @@
                   <a:srgbClr val="1B3B6F"/>
                 </a:solidFill>
                 <a:latin typeface="Amiri" pitchFamily="2" charset="-78"/>
+                <a:ea typeface="Amiri" pitchFamily="2" charset="-78"/>
                 <a:cs typeface="Amiri" pitchFamily="2" charset="-78"/>
               </a:rPr>
               <a:t>مَاذَا تَحْمِلُ فِي حَقِيبَتِكَ؟</a:t>
@@ -23160,6 +23319,7 @@
                   <a:srgbClr val="1B3B6F"/>
                 </a:solidFill>
                 <a:latin typeface="Amiri" pitchFamily="2" charset="-78"/>
+                <a:ea typeface="Amiri" pitchFamily="2" charset="-78"/>
                 <a:cs typeface="Amiri" pitchFamily="2" charset="-78"/>
               </a:rPr>
               <a:t>يَجِبُ أَنْ يَكُونَ صَبُورًا وَمُنَظَّمًا.</a:t>
@@ -23236,6 +23396,7 @@
                   <a:srgbClr val="1B3B6F"/>
                 </a:solidFill>
                 <a:latin typeface="Amiri" pitchFamily="2" charset="-78"/>
+                <a:ea typeface="Amiri" pitchFamily="2" charset="-78"/>
                 <a:cs typeface="Amiri" pitchFamily="2" charset="-78"/>
               </a:rPr>
               <a:t>مَا الصِّفَاتُ المُهِمَّةُ لِلْمُعَلِّمِ؟</a:t>
@@ -23339,6 +23500,7 @@
                   <a:srgbClr val="1B3B6F"/>
                 </a:solidFill>
                 <a:latin typeface="Amiri" pitchFamily="2" charset="-78"/>
+                <a:ea typeface="Amiri" pitchFamily="2" charset="-78"/>
                 <a:cs typeface="Amiri" pitchFamily="2" charset="-78"/>
               </a:rPr>
               <a:t>أُرِيدُ أَنْ أَكُونَ طَبِيبَ أَسْنَانٍ، لِأَنَّ الرَّاتِبَ جَيِّدٌ.</a:t>
@@ -23415,6 +23577,7 @@
                   <a:srgbClr val="1B3B6F"/>
                 </a:solidFill>
                 <a:latin typeface="Amiri" pitchFamily="2" charset="-78"/>
+                <a:ea typeface="Amiri" pitchFamily="2" charset="-78"/>
                 <a:cs typeface="Amiri" pitchFamily="2" charset="-78"/>
               </a:rPr>
               <a:t>مَا الوَظِيفَةُ الَّتِي تُرِيدُهَا؟</a:t>
@@ -23624,6 +23787,7 @@
                   <a:srgbClr val="D4AF37"/>
                 </a:solidFill>
                 <a:latin typeface="Amiri" pitchFamily="2" charset="-78"/>
+                <a:ea typeface="Amiri" pitchFamily="2" charset="-78"/>
                 <a:cs typeface="Amiri" pitchFamily="2" charset="-78"/>
               </a:rPr>
               <a:t>م</a:t>
@@ -23944,6 +24108,7 @@
                   <a:srgbClr val="8A6D1E"/>
                 </a:solidFill>
                 <a:latin typeface="Amiri" pitchFamily="2" charset="-78"/>
+                <a:ea typeface="Amiri" pitchFamily="2" charset="-78"/>
                 <a:cs typeface="Amiri" pitchFamily="2" charset="-78"/>
               </a:rPr>
               <a:t>نَمُوذَجُ الإِجَابَةِ</a:t>
@@ -24186,6 +24351,7 @@
                   <a:srgbClr val="1B3B6F"/>
                 </a:solidFill>
                 <a:latin typeface="Amiri" pitchFamily="2" charset="-78"/>
+                <a:ea typeface="Amiri" pitchFamily="2" charset="-78"/>
                 <a:cs typeface="Amiri" pitchFamily="2" charset="-78"/>
               </a:rPr>
               <a:t>كَانَتِ الابْتِدَائِيَّةُ صَغِيرَةً وَقَرِيبَةً مِنْ بَيْتِي، أَمَّا الثَّانَوِيَّةُ فَأَكْبَرُ بِكَثِيرٍ، وَفِيهَا مُخْتَبَرَاتٌ وَمَكْتَبَةٌ حَدِيثَةٌ.</a:t>
@@ -24262,6 +24428,7 @@
                   <a:srgbClr val="1B3B6F"/>
                 </a:solidFill>
                 <a:latin typeface="Amiri" pitchFamily="2" charset="-78"/>
+                <a:ea typeface="Amiri" pitchFamily="2" charset="-78"/>
                 <a:cs typeface="Amiri" pitchFamily="2" charset="-78"/>
               </a:rPr>
               <a:t>قَارِنْ بَيْنَ مَدْرَسَتِكَ الابْتِدَائِيَّةِ وَالثَّانَوِيَّةِ.</a:t>
@@ -24365,6 +24532,7 @@
                   <a:srgbClr val="1B3B6F"/>
                 </a:solidFill>
                 <a:latin typeface="Amiri" pitchFamily="2" charset="-78"/>
+                <a:ea typeface="Amiri" pitchFamily="2" charset="-78"/>
                 <a:cs typeface="Amiri" pitchFamily="2" charset="-78"/>
               </a:rPr>
               <a:t>رَاجِعْ قَلِيلًا كُلَّ يَوْمٍ، وَلَا تَسْهَرْ لَيْلَةَ الامْتِحَانِ، لِأَنَّ النَّوْمَ يُسَاعِدُ الذَّاكِرَةَ.</a:t>
@@ -24441,6 +24609,7 @@
                   <a:srgbClr val="1B3B6F"/>
                 </a:solidFill>
                 <a:latin typeface="Amiri" pitchFamily="2" charset="-78"/>
+                <a:ea typeface="Amiri" pitchFamily="2" charset="-78"/>
                 <a:cs typeface="Amiri" pitchFamily="2" charset="-78"/>
               </a:rPr>
               <a:t>مَا نَصِيحَتُكَ لِطَالِبٍ قَبْلَ الامْتِحَانَاتِ؟</a:t>
@@ -24544,6 +24713,7 @@
                   <a:srgbClr val="1B3B6F"/>
                 </a:solidFill>
                 <a:latin typeface="Amiri" pitchFamily="2" charset="-78"/>
+                <a:ea typeface="Amiri" pitchFamily="2" charset="-78"/>
                 <a:cs typeface="Amiri" pitchFamily="2" charset="-78"/>
               </a:rPr>
               <a:t>عَمِلْتُ أُسْبُوعًا فِي مَكْتَبِ مُحَامٍ؛ كَانَ المَكْتَبُ هَادِئًا، وَكَانَ الزُّمَلَاءُ لُطَفَاءَ، لٰكِنَّ السَّاعَاتِ كَانَتْ طَوِيلَةً.</a:t>
@@ -24620,6 +24790,7 @@
                   <a:srgbClr val="1B3B6F"/>
                 </a:solidFill>
                 <a:latin typeface="Amiri" pitchFamily="2" charset="-78"/>
+                <a:ea typeface="Amiri" pitchFamily="2" charset="-78"/>
                 <a:cs typeface="Amiri" pitchFamily="2" charset="-78"/>
               </a:rPr>
               <a:t>صِفْ مَكَانَ عَمَلٍ زُرْتَهُ أَوْ عَمِلْتَ فِيهِ.</a:t>
@@ -24723,6 +24894,7 @@
                   <a:srgbClr val="1B3B6F"/>
                 </a:solidFill>
                 <a:latin typeface="Amiri" pitchFamily="2" charset="-78"/>
+                <a:ea typeface="Amiri" pitchFamily="2" charset="-78"/>
                 <a:cs typeface="Amiri" pitchFamily="2" charset="-78"/>
               </a:rPr>
               <a:t>أُرِيدُ أَنْ أَحْصُلَ عَلَى شَهَادَةٍ فِي البَرْمَجَةِ، لِكَيْ أَجِدَ عَمَلًا جُزْئِيًّا وَأَنَا فِي الجَامِعَةِ.</a:t>
@@ -24799,6 +24971,7 @@
                   <a:srgbClr val="1B3B6F"/>
                 </a:solidFill>
                 <a:latin typeface="Amiri" pitchFamily="2" charset="-78"/>
+                <a:ea typeface="Amiri" pitchFamily="2" charset="-78"/>
                 <a:cs typeface="Amiri" pitchFamily="2" charset="-78"/>
               </a:rPr>
               <a:t>مَا الشَّهَادَاتُ أَوِ الدَّوْرَاتُ الَّتِي تُرِيدُهَا؟</a:t>
@@ -24902,6 +25075,7 @@
                   <a:srgbClr val="1B3B6F"/>
                 </a:solidFill>
                 <a:latin typeface="Amiri" pitchFamily="2" charset="-78"/>
+                <a:ea typeface="Amiri" pitchFamily="2" charset="-78"/>
                 <a:cs typeface="Amiri" pitchFamily="2" charset="-78"/>
               </a:rPr>
               <a:t>أَطْمَحُ إِلَى أَنْ أَعْمَلَ فِي شَرِكَةٍ دُوَلِيَّةٍ، لِأَنِّي أُحِبُّ السَّفَرَ وَاللُّغَاتِ.</a:t>
@@ -24978,6 +25152,7 @@
                   <a:srgbClr val="1B3B6F"/>
                 </a:solidFill>
                 <a:latin typeface="Amiri" pitchFamily="2" charset="-78"/>
+                <a:ea typeface="Amiri" pitchFamily="2" charset="-78"/>
                 <a:cs typeface="Amiri" pitchFamily="2" charset="-78"/>
               </a:rPr>
               <a:t>أَيْنَ تُحِبُّ أَنْ تَعْمَلَ فِي المُسْتَقْبَلِ؟</a:t>
@@ -25187,6 +25362,7 @@
                   <a:srgbClr val="D4AF37"/>
                 </a:solidFill>
                 <a:latin typeface="Amiri" pitchFamily="2" charset="-78"/>
+                <a:ea typeface="Amiri" pitchFamily="2" charset="-78"/>
                 <a:cs typeface="Amiri" pitchFamily="2" charset="-78"/>
               </a:rPr>
               <a:t>م</a:t>
@@ -25507,6 +25683,7 @@
                   <a:srgbClr val="8A6D1E"/>
                 </a:solidFill>
                 <a:latin typeface="Amiri" pitchFamily="2" charset="-78"/>
+                <a:ea typeface="Amiri" pitchFamily="2" charset="-78"/>
                 <a:cs typeface="Amiri" pitchFamily="2" charset="-78"/>
               </a:rPr>
               <a:t>نَمُوذَجُ الإِجَابَةِ</a:t>
@@ -25749,6 +25926,7 @@
                   <a:srgbClr val="1B3B6F"/>
                 </a:solidFill>
                 <a:latin typeface="Amiri" pitchFamily="2" charset="-78"/>
+                <a:ea typeface="Amiri" pitchFamily="2" charset="-78"/>
                 <a:cs typeface="Amiri" pitchFamily="2" charset="-78"/>
               </a:rPr>
               <a:t>صَحِيحٌ أَنَّهَا عَادِلَةٌ وَوَاضِحَةٌ، غَيْرَ أَنَّهَا لَا تَقِيسُ الإِبْدَاعَ وَالعَمَلَ الجَمَاعِيَّ، لِذٰلِكَ أُفَضِّلُ أَنْ تُضَافَ إِلَيْهَا مَشَارِيعُ.</a:t>
@@ -25825,6 +26003,7 @@
                   <a:srgbClr val="1B3B6F"/>
                 </a:solidFill>
                 <a:latin typeface="Amiri" pitchFamily="2" charset="-78"/>
+                <a:ea typeface="Amiri" pitchFamily="2" charset="-78"/>
                 <a:cs typeface="Amiri" pitchFamily="2" charset="-78"/>
               </a:rPr>
               <a:t>هَلِ الامْتِحَانَاتُ أَفْضَلُ طَرِيقَةٍ لِتَقْيِيمِ الطُّلَّابِ؟</a:t>
@@ -25928,6 +26107,7 @@
                   <a:srgbClr val="1B3B6F"/>
                 </a:solidFill>
                 <a:latin typeface="Amiri" pitchFamily="2" charset="-78"/>
+                <a:ea typeface="Amiri" pitchFamily="2" charset="-78"/>
                 <a:cs typeface="Amiri" pitchFamily="2" charset="-78"/>
               </a:rPr>
               <a:t>سَتَخْتَفِي بَعْضُ الوَظَائِفِ الرُّوتِينِيَّةِ، وَسَتَظْهَرُ وَظَائِفُ جَدِيدَةٌ، مِمَّا يَعْنِي أَنَّنَا سَنَحْتَاجُ إِلَى التَّعَلُّمِ طُولَ الحَيَاةِ.</a:t>
@@ -26004,6 +26184,7 @@
                   <a:srgbClr val="1B3B6F"/>
                 </a:solidFill>
                 <a:latin typeface="Amiri" pitchFamily="2" charset="-78"/>
+                <a:ea typeface="Amiri" pitchFamily="2" charset="-78"/>
                 <a:cs typeface="Amiri" pitchFamily="2" charset="-78"/>
               </a:rPr>
               <a:t>كَيْفَ سَيَتَغَيَّرُ عَالَمُ العَمَلِ بِسَبَبِ التِّكْنُولُوجْيَا؟</a:t>
@@ -26107,6 +26288,7 @@
                   <a:srgbClr val="1B3B6F"/>
                 </a:solidFill>
                 <a:latin typeface="Amiri" pitchFamily="2" charset="-78"/>
+                <a:ea typeface="Amiri" pitchFamily="2" charset="-78"/>
                 <a:cs typeface="Amiri" pitchFamily="2" charset="-78"/>
               </a:rPr>
               <a:t>مِنْ نَاحِيَةٍ، نَحْتَاجُ إِلَى رَاتِبٍ يَكْفِي لِحَيَاةٍ كَرِيمَةٍ، وَمِنْ نَاحِيَةٍ أُخْرَى، نَقْضِي فِي العَمَلِ ثُلُثَ حَيَاتِنَا، فَلَا بُدَّ أَنْ نُحِبَّهُ.</a:t>
@@ -26183,6 +26365,7 @@
                   <a:srgbClr val="1B3B6F"/>
                 </a:solidFill>
                 <a:latin typeface="Amiri" pitchFamily="2" charset="-78"/>
+                <a:ea typeface="Amiri" pitchFamily="2" charset="-78"/>
                 <a:cs typeface="Amiri" pitchFamily="2" charset="-78"/>
               </a:rPr>
               <a:t>هَلِ الرَّاتِبُ أَهَمُّ مِنَ السَّعَادَةِ فِي العَمَلِ؟</a:t>
@@ -26392,6 +26575,7 @@
                   <a:srgbClr val="D4AF37"/>
                 </a:solidFill>
                 <a:latin typeface="Amiri" pitchFamily="2" charset="-78"/>
+                <a:ea typeface="Amiri" pitchFamily="2" charset="-78"/>
                 <a:cs typeface="Amiri" pitchFamily="2" charset="-78"/>
               </a:rPr>
               <a:t>م</a:t>
@@ -26712,6 +26896,7 @@
                   <a:srgbClr val="8A6D1E"/>
                 </a:solidFill>
                 <a:latin typeface="Amiri" pitchFamily="2" charset="-78"/>
+                <a:ea typeface="Amiri" pitchFamily="2" charset="-78"/>
                 <a:cs typeface="Amiri" pitchFamily="2" charset="-78"/>
               </a:rPr>
               <a:t>نَمُوذَجُ الإِجَابَةِ</a:t>
@@ -26954,6 +27139,7 @@
                   <a:srgbClr val="1B3B6F"/>
                 </a:solidFill>
                 <a:latin typeface="Amiri" pitchFamily="2" charset="-78"/>
+                <a:ea typeface="Amiri" pitchFamily="2" charset="-78"/>
                 <a:cs typeface="Amiri" pitchFamily="2" charset="-78"/>
               </a:rPr>
               <a:t>أَثَّرَتْ فِيَّ مُعَلِّمَةُ العُلُومِ عِنْدَمَا شَجَّعَتْنِي عَلَى المُشَارَكَةِ فِي مُسَابَقَةٍ، فَاكْتَشَفْتُ حُبِّي لِلْبَحْثِ العِلْمِيِّ.</a:t>
@@ -27030,6 +27216,7 @@
                   <a:srgbClr val="1B3B6F"/>
                 </a:solidFill>
                 <a:latin typeface="Amiri" pitchFamily="2" charset="-78"/>
+                <a:ea typeface="Amiri" pitchFamily="2" charset="-78"/>
                 <a:cs typeface="Amiri" pitchFamily="2" charset="-78"/>
               </a:rPr>
               <a:t>مَنْ أَثَّرَ فِي اخْتِيَارِكَ لِمِهْنَتِكَ؟</a:t>
@@ -27133,6 +27320,7 @@
                   <a:srgbClr val="1B3B6F"/>
                 </a:solidFill>
                 <a:latin typeface="Amiri" pitchFamily="2" charset="-78"/>
+                <a:ea typeface="Amiri" pitchFamily="2" charset="-78"/>
                 <a:cs typeface="Amiri" pitchFamily="2" charset="-78"/>
               </a:rPr>
               <a:t>لَوْ كُنْتُ وَزِيرًا لِلتَّعْلِيمِ، لَأَضَفْتُ حِصَّةً أُسْبُوعِيَّةً لِلْمَهَارَاتِ المِهْنِيَّةِ، وَلَجَعَلْتُ التَّدْرِيبَ فِي الشَّرِكَاتِ جُزْءًا مِنَ المَنْهَجِ.</a:t>
@@ -27209,6 +27397,7 @@
                   <a:srgbClr val="1B3B6F"/>
                 </a:solidFill>
                 <a:latin typeface="Amiri" pitchFamily="2" charset="-78"/>
+                <a:ea typeface="Amiri" pitchFamily="2" charset="-78"/>
                 <a:cs typeface="Amiri" pitchFamily="2" charset="-78"/>
               </a:rPr>
               <a:t>لَوْ كُنْتَ وَزِيرَ التَّعْلِيمِ، مَاذَا تُغَيِّرُ؟</a:t>
@@ -27418,6 +27607,7 @@
                   <a:srgbClr val="D4AF37"/>
                 </a:solidFill>
                 <a:latin typeface="Amiri" pitchFamily="2" charset="-78"/>
+                <a:ea typeface="Amiri" pitchFamily="2" charset="-78"/>
                 <a:cs typeface="Amiri" pitchFamily="2" charset="-78"/>
               </a:rPr>
               <a:t>م</a:t>
@@ -27738,6 +27928,7 @@
                   <a:srgbClr val="8A6D1E"/>
                 </a:solidFill>
                 <a:latin typeface="Amiri" pitchFamily="2" charset="-78"/>
+                <a:ea typeface="Amiri" pitchFamily="2" charset="-78"/>
                 <a:cs typeface="Amiri" pitchFamily="2" charset="-78"/>
               </a:rPr>
               <a:t>قَيِّمْ عَمَلَكَ</a:t>
@@ -28982,6 +29173,7 @@
                   <a:srgbClr val="FFFFFF"/>
                 </a:solidFill>
                 <a:latin typeface="Amiri" pitchFamily="2" charset="-78"/>
+                <a:ea typeface="Amiri" pitchFamily="2" charset="-78"/>
                 <a:cs typeface="Amiri" pitchFamily="2" charset="-78"/>
               </a:rPr>
               <a:t>أَحْسَنْتُمْ! إِلَى اللِّقَاءِ</a:t>
@@ -29134,6 +29326,7 @@
                   <a:srgbClr val="D4AF37"/>
                 </a:solidFill>
                 <a:latin typeface="Amiri" pitchFamily="2" charset="-78"/>
+                <a:ea typeface="Amiri" pitchFamily="2" charset="-78"/>
                 <a:cs typeface="Amiri" pitchFamily="2" charset="-78"/>
               </a:rPr>
               <a:t>وَرْشَةُ الكِتَابَةِ</a:t>
@@ -29267,6 +29460,7 @@
                   <a:srgbClr val="D4AF37"/>
                 </a:solidFill>
                 <a:latin typeface="Amiri" pitchFamily="2" charset="-78"/>
+                <a:ea typeface="Amiri" pitchFamily="2" charset="-78"/>
                 <a:cs typeface="Amiri" pitchFamily="2" charset="-78"/>
               </a:rPr>
               <a:t>م</a:t>
@@ -29587,6 +29781,7 @@
                   <a:srgbClr val="8A6D1E"/>
                 </a:solidFill>
                 <a:latin typeface="Amiri" pitchFamily="2" charset="-78"/>
+                <a:ea typeface="Amiri" pitchFamily="2" charset="-78"/>
                 <a:cs typeface="Amiri" pitchFamily="2" charset="-78"/>
               </a:rPr>
               <a:t>خَرِيطَةُ الوَرْشَةِ</a:t>
@@ -29901,6 +30096,7 @@
                   <a:srgbClr val="1B3B6F"/>
                 </a:solidFill>
                 <a:latin typeface="Amiri" pitchFamily="2" charset="-78"/>
+                <a:ea typeface="Amiri" pitchFamily="2" charset="-78"/>
                 <a:cs typeface="Amiri" pitchFamily="2" charset="-78"/>
               </a:rPr>
               <a:t>كَيْفَ</a:t>
@@ -30177,6 +30373,7 @@
                   <a:srgbClr val="1E6B52"/>
                 </a:solidFill>
                 <a:latin typeface="Amiri" pitchFamily="2" charset="-78"/>
+                <a:ea typeface="Amiri" pitchFamily="2" charset="-78"/>
                 <a:cs typeface="Amiri" pitchFamily="2" charset="-78"/>
               </a:rPr>
               <a:t>تَمْثِيلُ الدَّوْرِ</a:t>
@@ -30453,6 +30650,7 @@
                   <a:srgbClr val="8A6D1E"/>
                 </a:solidFill>
                 <a:latin typeface="Amiri" pitchFamily="2" charset="-78"/>
+                <a:ea typeface="Amiri" pitchFamily="2" charset="-78"/>
                 <a:cs typeface="Amiri" pitchFamily="2" charset="-78"/>
               </a:rPr>
               <a:t>النَّمُوذَجُ</a:t>
@@ -30729,6 +30927,7 @@
                   <a:srgbClr val="1E6B52"/>
                 </a:solidFill>
                 <a:latin typeface="Amiri" pitchFamily="2" charset="-78"/>
+                <a:ea typeface="Amiri" pitchFamily="2" charset="-78"/>
                 <a:cs typeface="Amiri" pitchFamily="2" charset="-78"/>
               </a:rPr>
               <a:t>المُحَادَثَةُ</a:t>
@@ -31005,6 +31204,7 @@
                   <a:srgbClr val="8A6D1E"/>
                 </a:solidFill>
                 <a:latin typeface="Amiri" pitchFamily="2" charset="-78"/>
+                <a:ea typeface="Amiri" pitchFamily="2" charset="-78"/>
                 <a:cs typeface="Amiri" pitchFamily="2" charset="-78"/>
               </a:rPr>
               <a:t>قَيِّمْ</a:t>
@@ -31248,6 +31448,7 @@
                   <a:srgbClr val="D4AF37"/>
                 </a:solidFill>
                 <a:latin typeface="Amiri" pitchFamily="2" charset="-78"/>
+                <a:ea typeface="Amiri" pitchFamily="2" charset="-78"/>
                 <a:cs typeface="Amiri" pitchFamily="2" charset="-78"/>
               </a:rPr>
               <a:t>م</a:t>
@@ -31568,6 +31769,7 @@
                   <a:srgbClr val="8A6D1E"/>
                 </a:solidFill>
                 <a:latin typeface="Amiri" pitchFamily="2" charset="-78"/>
+                <a:ea typeface="Amiri" pitchFamily="2" charset="-78"/>
                 <a:cs typeface="Amiri" pitchFamily="2" charset="-78"/>
               </a:rPr>
               <a:t>امْتِحَانُ التَّحَدُّثِ</a:t>
@@ -32192,6 +32394,7 @@
                   <a:srgbClr val="1B3B6F"/>
                 </a:solidFill>
                 <a:latin typeface="Amiri" pitchFamily="2" charset="-78"/>
+                <a:ea typeface="Amiri" pitchFamily="2" charset="-78"/>
                 <a:cs typeface="Amiri" pitchFamily="2" charset="-78"/>
               </a:rPr>
               <a:t>عَفْوًا، هَلْ يُمْكِنُ أَنْ تُعِيدَ السُّؤَالَ؟</a:t>
@@ -32291,6 +32494,7 @@
                   <a:srgbClr val="1B3B6F"/>
                 </a:solidFill>
                 <a:latin typeface="Amiri" pitchFamily="2" charset="-78"/>
+                <a:ea typeface="Amiri" pitchFamily="2" charset="-78"/>
                 <a:cs typeface="Amiri" pitchFamily="2" charset="-78"/>
               </a:rPr>
               <a:t>لَحْظَةً، دَعْنِي أُفَكِّرُ …</a:t>
@@ -32390,6 +32594,7 @@
                   <a:srgbClr val="1B3B6F"/>
                 </a:solidFill>
                 <a:latin typeface="Amiri" pitchFamily="2" charset="-78"/>
+                <a:ea typeface="Amiri" pitchFamily="2" charset="-78"/>
                 <a:cs typeface="Amiri" pitchFamily="2" charset="-78"/>
               </a:rPr>
               <a:t>أَقْصِدُ …</a:t>
@@ -32561,6 +32766,7 @@
                   <a:srgbClr val="D4AF37"/>
                 </a:solidFill>
                 <a:latin typeface="Amiri" pitchFamily="2" charset="-78"/>
+                <a:ea typeface="Amiri" pitchFamily="2" charset="-78"/>
                 <a:cs typeface="Amiri" pitchFamily="2" charset="-78"/>
               </a:rPr>
               <a:t>م</a:t>
@@ -32881,6 +33087,7 @@
                   <a:srgbClr val="8A6D1E"/>
                 </a:solidFill>
                 <a:latin typeface="Amiri" pitchFamily="2" charset="-78"/>
+                <a:ea typeface="Amiri" pitchFamily="2" charset="-78"/>
                 <a:cs typeface="Amiri" pitchFamily="2" charset="-78"/>
               </a:rPr>
               <a:t>المِحْوَرُ د فِي اثْنَتَيْ عَشْرَةَ بِنْيَةً</a:t>
@@ -33184,6 +33391,7 @@
                   <a:srgbClr val="1B3B6F"/>
                 </a:solidFill>
                 <a:latin typeface="Amiri" pitchFamily="2" charset="-78"/>
+                <a:ea typeface="Amiri" pitchFamily="2" charset="-78"/>
                 <a:cs typeface="Amiri" pitchFamily="2" charset="-78"/>
               </a:rPr>
               <a:t>المَرْحَلَةُ الابْتِدَائِيَّةُ</a:t>
@@ -33341,6 +33549,7 @@
                   <a:srgbClr val="1B3B6F"/>
                 </a:solidFill>
                 <a:latin typeface="Amiri" pitchFamily="2" charset="-78"/>
+                <a:ea typeface="Amiri" pitchFamily="2" charset="-78"/>
                 <a:cs typeface="Amiri" pitchFamily="2" charset="-78"/>
               </a:rPr>
               <a:t>الجَامِعَةُ</a:t>
@@ -33444,6 +33653,7 @@
                   <a:srgbClr val="1B3B6F"/>
                 </a:solidFill>
                 <a:latin typeface="Amiri" pitchFamily="2" charset="-78"/>
+                <a:ea typeface="Amiri" pitchFamily="2" charset="-78"/>
                 <a:cs typeface="Amiri" pitchFamily="2" charset="-78"/>
               </a:rPr>
               <a:t>الثَّانَوِيَّةُ</a:t>
@@ -33709,6 +33919,7 @@
                   <a:srgbClr val="1B3B6F"/>
                 </a:solidFill>
                 <a:latin typeface="Amiri" pitchFamily="2" charset="-78"/>
+                <a:ea typeface="Amiri" pitchFamily="2" charset="-78"/>
                 <a:cs typeface="Amiri" pitchFamily="2" charset="-78"/>
               </a:rPr>
               <a:t>أَحْتَاجُ إِلَى … · أَسْتَخْدِمُ …</a:t>
@@ -33866,6 +34077,7 @@
                   <a:srgbClr val="1B3B6F"/>
                 </a:solidFill>
                 <a:latin typeface="Amiri" pitchFamily="2" charset="-78"/>
+                <a:ea typeface="Amiri" pitchFamily="2" charset="-78"/>
                 <a:cs typeface="Amiri" pitchFamily="2" charset="-78"/>
               </a:rPr>
               <a:t>آلَةٌ حَاسِبَةٌ</a:t>
@@ -33969,6 +34181,7 @@
                   <a:srgbClr val="1B3B6F"/>
                 </a:solidFill>
                 <a:latin typeface="Amiri" pitchFamily="2" charset="-78"/>
+                <a:ea typeface="Amiri" pitchFamily="2" charset="-78"/>
                 <a:cs typeface="Amiri" pitchFamily="2" charset="-78"/>
               </a:rPr>
               <a:t>مِسْطَرَةٌ</a:t>
@@ -34234,6 +34447,7 @@
                   <a:srgbClr val="1B3B6F"/>
                 </a:solidFill>
                 <a:latin typeface="Amiri" pitchFamily="2" charset="-78"/>
+                <a:ea typeface="Amiri" pitchFamily="2" charset="-78"/>
                 <a:cs typeface="Amiri" pitchFamily="2" charset="-78"/>
               </a:rPr>
               <a:t>تَبْدَأُ الحِصَّةُ فِي …</a:t>
@@ -34391,6 +34605,7 @@
                   <a:srgbClr val="1B3B6F"/>
                 </a:solidFill>
                 <a:latin typeface="Amiri" pitchFamily="2" charset="-78"/>
+                <a:ea typeface="Amiri" pitchFamily="2" charset="-78"/>
                 <a:cs typeface="Amiri" pitchFamily="2" charset="-78"/>
               </a:rPr>
               <a:t>أُفَضِّلُ</a:t>
@@ -34494,6 +34709,7 @@
                   <a:srgbClr val="1B3B6F"/>
                 </a:solidFill>
                 <a:latin typeface="Amiri" pitchFamily="2" charset="-78"/>
+                <a:ea typeface="Amiri" pitchFamily="2" charset="-78"/>
                 <a:cs typeface="Amiri" pitchFamily="2" charset="-78"/>
               </a:rPr>
               <a:t>فِي الثَّامِنَةِ وَالنِّصْفِ</a:t>
@@ -34759,6 +34975,7 @@
                   <a:srgbClr val="1B3B6F"/>
                 </a:solidFill>
                 <a:latin typeface="Amiri" pitchFamily="2" charset="-78"/>
+                <a:ea typeface="Amiri" pitchFamily="2" charset="-78"/>
                 <a:cs typeface="Amiri" pitchFamily="2" charset="-78"/>
               </a:rPr>
               <a:t>أُرَاجِعُ · رَاجِعْ!</a:t>
@@ -34916,6 +35133,7 @@
                   <a:srgbClr val="1B3B6F"/>
                 </a:solidFill>
                 <a:latin typeface="Amiri" pitchFamily="2" charset="-78"/>
+                <a:ea typeface="Amiri" pitchFamily="2" charset="-78"/>
                 <a:cs typeface="Amiri" pitchFamily="2" charset="-78"/>
               </a:rPr>
               <a:t>نَجَحْتُ فِي</a:t>
@@ -35019,6 +35237,7 @@
                   <a:srgbClr val="1B3B6F"/>
                 </a:solidFill>
                 <a:latin typeface="Amiri" pitchFamily="2" charset="-78"/>
+                <a:ea typeface="Amiri" pitchFamily="2" charset="-78"/>
                 <a:cs typeface="Amiri" pitchFamily="2" charset="-78"/>
               </a:rPr>
               <a:t>يَنْبَغِي أَنْ</a:t>
@@ -35284,6 +35503,7 @@
                   <a:srgbClr val="1B3B6F"/>
                 </a:solidFill>
                 <a:latin typeface="Amiri" pitchFamily="2" charset="-78"/>
+                <a:ea typeface="Amiri" pitchFamily="2" charset="-78"/>
                 <a:cs typeface="Amiri" pitchFamily="2" charset="-78"/>
               </a:rPr>
               <a:t>حَصَلْتُ عَلَى شَهَادَةٍ</a:t>
@@ -35441,6 +35661,7 @@
                   <a:srgbClr val="1B3B6F"/>
                 </a:solidFill>
                 <a:latin typeface="Amiri" pitchFamily="2" charset="-78"/>
+                <a:ea typeface="Amiri" pitchFamily="2" charset="-78"/>
                 <a:cs typeface="Amiri" pitchFamily="2" charset="-78"/>
               </a:rPr>
               <a:t>تَعَلُّمُ</a:t>
@@ -35544,6 +35765,7 @@
                   <a:srgbClr val="1B3B6F"/>
                 </a:solidFill>
                 <a:latin typeface="Amiri" pitchFamily="2" charset="-78"/>
+                <a:ea typeface="Amiri" pitchFamily="2" charset="-78"/>
                 <a:cs typeface="Amiri" pitchFamily="2" charset="-78"/>
               </a:rPr>
               <a:t>دَوْرَةٌ فِي</a:t>
@@ -35809,6 +36031,7 @@
                   <a:srgbClr val="1B3B6F"/>
                 </a:solidFill>
                 <a:latin typeface="Amiri" pitchFamily="2" charset="-78"/>
+                <a:ea typeface="Amiri" pitchFamily="2" charset="-78"/>
                 <a:cs typeface="Amiri" pitchFamily="2" charset="-78"/>
               </a:rPr>
               <a:t>طَبِيبٌ · طَبِيبَةٌ · أَطِبَّاءُ</a:t>
@@ -35966,6 +36189,7 @@
                   <a:srgbClr val="1B3B6F"/>
                 </a:solidFill>
                 <a:latin typeface="Amiri" pitchFamily="2" charset="-78"/>
+                <a:ea typeface="Amiri" pitchFamily="2" charset="-78"/>
                 <a:cs typeface="Amiri" pitchFamily="2" charset="-78"/>
               </a:rPr>
               <a:t>مُعَلِّمُونَ</a:t>
@@ -36069,6 +36293,7 @@
                   <a:srgbClr val="1B3B6F"/>
                 </a:solidFill>
                 <a:latin typeface="Amiri" pitchFamily="2" charset="-78"/>
+                <a:ea typeface="Amiri" pitchFamily="2" charset="-78"/>
                 <a:cs typeface="Amiri" pitchFamily="2" charset="-78"/>
               </a:rPr>
               <a:t>مُهَنْدِسَةٌ</a:t>
@@ -36202,6 +36427,7 @@
                   <a:srgbClr val="D4AF37"/>
                 </a:solidFill>
                 <a:latin typeface="Amiri" pitchFamily="2" charset="-78"/>
+                <a:ea typeface="Amiri" pitchFamily="2" charset="-78"/>
                 <a:cs typeface="Amiri" pitchFamily="2" charset="-78"/>
               </a:rPr>
               <a:t>م</a:t>
@@ -36522,6 +36748,7 @@
                   <a:srgbClr val="8A6D1E"/>
                 </a:solidFill>
                 <a:latin typeface="Amiri" pitchFamily="2" charset="-78"/>
+                <a:ea typeface="Amiri" pitchFamily="2" charset="-78"/>
                 <a:cs typeface="Amiri" pitchFamily="2" charset="-78"/>
               </a:rPr>
               <a:t>بِنْيَاتٌ تَرْفَعُ الدَّرَجَةَ</a:t>
@@ -36825,6 +37052,7 @@
                   <a:srgbClr val="1B3B6F"/>
                 </a:solidFill>
                 <a:latin typeface="Amiri" pitchFamily="2" charset="-78"/>
+                <a:ea typeface="Amiri" pitchFamily="2" charset="-78"/>
                 <a:cs typeface="Amiri" pitchFamily="2" charset="-78"/>
               </a:rPr>
               <a:t>كُنْتُ أَعْمَلُ فِي …</a:t>
@@ -36982,6 +37210,7 @@
                   <a:srgbClr val="1B3B6F"/>
                 </a:solidFill>
                 <a:latin typeface="Amiri" pitchFamily="2" charset="-78"/>
+                <a:ea typeface="Amiri" pitchFamily="2" charset="-78"/>
                 <a:cs typeface="Amiri" pitchFamily="2" charset="-78"/>
               </a:rPr>
               <a:t>زُمَلَاءُ</a:t>
@@ -37085,6 +37314,7 @@
                   <a:srgbClr val="1B3B6F"/>
                 </a:solidFill>
                 <a:latin typeface="Amiri" pitchFamily="2" charset="-78"/>
+                <a:ea typeface="Amiri" pitchFamily="2" charset="-78"/>
                 <a:cs typeface="Amiri" pitchFamily="2" charset="-78"/>
               </a:rPr>
               <a:t>نَوْبَاتٌ</a:t>
@@ -37350,6 +37580,7 @@
                   <a:srgbClr val="1B3B6F"/>
                 </a:solidFill>
                 <a:latin typeface="Amiri" pitchFamily="2" charset="-78"/>
+                <a:ea typeface="Amiri" pitchFamily="2" charset="-78"/>
                 <a:cs typeface="Amiri" pitchFamily="2" charset="-78"/>
               </a:rPr>
               <a:t>صَبُورٌ · مُنَظَّمٌ · دَقِيقٌ</a:t>
@@ -37507,6 +37738,7 @@
                   <a:srgbClr val="1B3B6F"/>
                 </a:solidFill>
                 <a:latin typeface="Amiri" pitchFamily="2" charset="-78"/>
+                <a:ea typeface="Amiri" pitchFamily="2" charset="-78"/>
                 <a:cs typeface="Amiri" pitchFamily="2" charset="-78"/>
               </a:rPr>
               <a:t>العَمَلُ الجَمَاعِيُّ</a:t>
@@ -37610,6 +37842,7 @@
                   <a:srgbClr val="1B3B6F"/>
                 </a:solidFill>
                 <a:latin typeface="Amiri" pitchFamily="2" charset="-78"/>
+                <a:ea typeface="Amiri" pitchFamily="2" charset="-78"/>
                 <a:cs typeface="Amiri" pitchFamily="2" charset="-78"/>
               </a:rPr>
               <a:t>صَبُورَةٌ · مُنَظَّمَةٌ</a:t>
@@ -37875,6 +38108,7 @@
                   <a:srgbClr val="1B3B6F"/>
                 </a:solidFill>
                 <a:latin typeface="Amiri" pitchFamily="2" charset="-78"/>
+                <a:ea typeface="Amiri" pitchFamily="2" charset="-78"/>
                 <a:cs typeface="Amiri" pitchFamily="2" charset="-78"/>
               </a:rPr>
               <a:t>أَوَدُّ أَنْ أَتَقَدَّمَ لِوَظِيفَةٍ</a:t>
@@ -38032,6 +38266,7 @@
                   <a:srgbClr val="1B3B6F"/>
                 </a:solidFill>
                 <a:latin typeface="Amiri" pitchFamily="2" charset="-78"/>
+                <a:ea typeface="Amiri" pitchFamily="2" charset="-78"/>
                 <a:cs typeface="Amiri" pitchFamily="2" charset="-78"/>
               </a:rPr>
               <a:t>أَتَطَلَّعُ إِلَى</a:t>
@@ -38135,6 +38370,7 @@
                   <a:srgbClr val="1B3B6F"/>
                 </a:solidFill>
                 <a:latin typeface="Amiri" pitchFamily="2" charset="-78"/>
+                <a:ea typeface="Amiri" pitchFamily="2" charset="-78"/>
                 <a:cs typeface="Amiri" pitchFamily="2" charset="-78"/>
               </a:rPr>
               <a:t>مُرْفَقٌ</a:t>
@@ -38400,6 +38636,7 @@
                   <a:srgbClr val="1B3B6F"/>
                 </a:solidFill>
                 <a:latin typeface="Amiri" pitchFamily="2" charset="-78"/>
+                <a:ea typeface="Amiri" pitchFamily="2" charset="-78"/>
                 <a:cs typeface="Amiri" pitchFamily="2" charset="-78"/>
               </a:rPr>
               <a:t>أَطْمَحُ إِلَى أَنْ …</a:t>
@@ -38557,6 +38794,7 @@
                   <a:srgbClr val="1B3B6F"/>
                 </a:solidFill>
                 <a:latin typeface="Amiri" pitchFamily="2" charset="-78"/>
+                <a:ea typeface="Amiri" pitchFamily="2" charset="-78"/>
                 <a:cs typeface="Amiri" pitchFamily="2" charset="-78"/>
               </a:rPr>
               <a:t>سَوْفَ</a:t>
@@ -38660,6 +38898,7 @@
                   <a:srgbClr val="1B3B6F"/>
                 </a:solidFill>
                 <a:latin typeface="Amiri" pitchFamily="2" charset="-78"/>
+                <a:ea typeface="Amiri" pitchFamily="2" charset="-78"/>
                 <a:cs typeface="Amiri" pitchFamily="2" charset="-78"/>
               </a:rPr>
               <a:t>خُطَّةٌ بَدِيلَةٌ</a:t>
@@ -38925,6 +39164,7 @@
                   <a:srgbClr val="1B3B6F"/>
                 </a:solidFill>
                 <a:latin typeface="Amiri" pitchFamily="2" charset="-78"/>
+                <a:ea typeface="Amiri" pitchFamily="2" charset="-78"/>
                 <a:cs typeface="Amiri" pitchFamily="2" charset="-78"/>
               </a:rPr>
               <a:t>أَوَّلًا · بِالإِضَافَةِ إِلَى ذٰلِكَ</a:t>
@@ -39082,6 +39322,7 @@
                   <a:srgbClr val="1B3B6F"/>
                 </a:solidFill>
                 <a:latin typeface="Amiri" pitchFamily="2" charset="-78"/>
+                <a:ea typeface="Amiri" pitchFamily="2" charset="-78"/>
                 <a:cs typeface="Amiri" pitchFamily="2" charset="-78"/>
               </a:rPr>
               <a:t>لِذٰلِكَ</a:t>
@@ -39185,6 +39426,7 @@
                   <a:srgbClr val="1B3B6F"/>
                 </a:solidFill>
                 <a:latin typeface="Amiri" pitchFamily="2" charset="-78"/>
+                <a:ea typeface="Amiri" pitchFamily="2" charset="-78"/>
                 <a:cs typeface="Amiri" pitchFamily="2" charset="-78"/>
               </a:rPr>
               <a:t>مَعَ ذٰلِكَ</a:t>
@@ -39450,6 +39692,7 @@
                   <a:srgbClr val="1B3B6F"/>
                 </a:solidFill>
                 <a:latin typeface="Amiri" pitchFamily="2" charset="-78"/>
+                <a:ea typeface="Amiri" pitchFamily="2" charset="-78"/>
                 <a:cs typeface="Amiri" pitchFamily="2" charset="-78"/>
               </a:rPr>
               <a:t>صَحِيحٌ أَنَّ … غَيْرَ أَنَّ …</a:t>
@@ -39607,6 +39850,7 @@
                   <a:srgbClr val="1B3B6F"/>
                 </a:solidFill>
                 <a:latin typeface="Amiri" pitchFamily="2" charset="-78"/>
+                <a:ea typeface="Amiri" pitchFamily="2" charset="-78"/>
                 <a:cs typeface="Amiri" pitchFamily="2" charset="-78"/>
               </a:rPr>
               <a:t>إِذَا … فَسَوْفَ</a:t>
@@ -39710,6 +39954,7 @@
                   <a:srgbClr val="1B3B6F"/>
                 </a:solidFill>
                 <a:latin typeface="Amiri" pitchFamily="2" charset="-78"/>
+                <a:ea typeface="Amiri" pitchFamily="2" charset="-78"/>
                 <a:cs typeface="Amiri" pitchFamily="2" charset="-78"/>
               </a:rPr>
               <a:t>لَوْ كُنْتُ … لَاخْتَرْتُ</a:t>
@@ -39843,6 +40088,7 @@
                   <a:srgbClr val="D4AF37"/>
                 </a:solidFill>
                 <a:latin typeface="Amiri" pitchFamily="2" charset="-78"/>
+                <a:ea typeface="Amiri" pitchFamily="2" charset="-78"/>
                 <a:cs typeface="Amiri" pitchFamily="2" charset="-78"/>
               </a:rPr>
               <a:t>م</a:t>
@@ -40163,6 +40409,7 @@
                   <a:srgbClr val="8A6D1E"/>
                 </a:solidFill>
                 <a:latin typeface="Amiri" pitchFamily="2" charset="-78"/>
+                <a:ea typeface="Amiri" pitchFamily="2" charset="-78"/>
                 <a:cs typeface="Amiri" pitchFamily="2" charset="-78"/>
               </a:rPr>
               <a:t>فِي الغُرَفِ</a:t>
@@ -41339,6 +41586,7 @@
                   <a:srgbClr val="1B3B6F"/>
                 </a:solidFill>
                 <a:latin typeface="Amiri" pitchFamily="2" charset="-78"/>
+                <a:ea typeface="Amiri" pitchFamily="2" charset="-78"/>
                 <a:cs typeface="Amiri" pitchFamily="2" charset="-78"/>
               </a:rPr>
               <a:t>دَوْرُكَ!</a:t>
@@ -41415,6 +41663,7 @@
                   <a:srgbClr val="1B3B6F"/>
                 </a:solidFill>
                 <a:latin typeface="Amiri" pitchFamily="2" charset="-78"/>
+                <a:ea typeface="Amiri" pitchFamily="2" charset="-78"/>
                 <a:cs typeface="Amiri" pitchFamily="2" charset="-78"/>
               </a:rPr>
               <a:t>أَحْسَنْتَ! / أَحْسَنْتِ!</a:t>
@@ -41491,6 +41740,7 @@
                   <a:srgbClr val="1B3B6F"/>
                 </a:solidFill>
                 <a:latin typeface="Amiri" pitchFamily="2" charset="-78"/>
+                <a:ea typeface="Amiri" pitchFamily="2" charset="-78"/>
                 <a:cs typeface="Amiri" pitchFamily="2" charset="-78"/>
               </a:rPr>
               <a:t>تَكَلَّمْ أَكْثَرَ، مِنْ فَضْلِكَ</a:t>
@@ -41567,6 +41817,7 @@
                   <a:srgbClr val="1B3B6F"/>
                 </a:solidFill>
                 <a:latin typeface="Amiri" pitchFamily="2" charset="-78"/>
+                <a:ea typeface="Amiri" pitchFamily="2" charset="-78"/>
                 <a:cs typeface="Amiri" pitchFamily="2" charset="-78"/>
               </a:rPr>
               <a:t>لِمَاذَا؟</a:t>
@@ -41738,6 +41989,7 @@
                   <a:srgbClr val="D4AF37"/>
                 </a:solidFill>
                 <a:latin typeface="Amiri" pitchFamily="2" charset="-78"/>
+                <a:ea typeface="Amiri" pitchFamily="2" charset="-78"/>
                 <a:cs typeface="Amiri" pitchFamily="2" charset="-78"/>
               </a:rPr>
               <a:t>م</a:t>
@@ -42058,6 +42310,7 @@
                   <a:srgbClr val="8A6D1E"/>
                 </a:solidFill>
                 <a:latin typeface="Amiri" pitchFamily="2" charset="-78"/>
+                <a:ea typeface="Amiri" pitchFamily="2" charset="-78"/>
                 <a:cs typeface="Amiri" pitchFamily="2" charset="-78"/>
               </a:rPr>
               <a:t>التَّسْجِيلُ فِي مَعْهَدٍ لِلُّغَةِ</a:t>
@@ -42338,6 +42591,7 @@
                   <a:srgbClr val="1B3B6F"/>
                 </a:solidFill>
                 <a:latin typeface="Amiri" pitchFamily="2" charset="-78"/>
+                <a:ea typeface="Amiri" pitchFamily="2" charset="-78"/>
                 <a:cs typeface="Amiri" pitchFamily="2" charset="-78"/>
               </a:rPr>
               <a:t>أُرِيدُ أَنْ أَدْرُسَ …</a:t>
@@ -42414,6 +42668,7 @@
                   <a:srgbClr val="1B3B6F"/>
                 </a:solidFill>
                 <a:latin typeface="Amiri" pitchFamily="2" charset="-78"/>
+                <a:ea typeface="Amiri" pitchFamily="2" charset="-78"/>
                 <a:cs typeface="Amiri" pitchFamily="2" charset="-78"/>
               </a:rPr>
               <a:t>أَهْلًا وَسَهْلًا! مَاذَا تُرِيدُ أَنْ تَدْرُسَ؟</a:t>
@@ -42582,6 +42837,7 @@
                   <a:srgbClr val="1B3B6F"/>
                 </a:solidFill>
                 <a:latin typeface="Amiri" pitchFamily="2" charset="-78"/>
+                <a:ea typeface="Amiri" pitchFamily="2" charset="-78"/>
                 <a:cs typeface="Amiri" pitchFamily="2" charset="-78"/>
               </a:rPr>
               <a:t>أَنَا فِي المَرْحَلَةِ … فِي الصَّفِّ …</a:t>
@@ -42658,6 +42914,7 @@
                   <a:srgbClr val="1B3B6F"/>
                 </a:solidFill>
                 <a:latin typeface="Amiri" pitchFamily="2" charset="-78"/>
+                <a:ea typeface="Amiri" pitchFamily="2" charset="-78"/>
                 <a:cs typeface="Amiri" pitchFamily="2" charset="-78"/>
               </a:rPr>
               <a:t>فِي أَيِّ مَرْحَلَةٍ تَدْرُسُ الآنَ؟</a:t>
@@ -42826,6 +43083,7 @@
                   <a:srgbClr val="1B3B6F"/>
                 </a:solidFill>
                 <a:latin typeface="Amiri" pitchFamily="2" charset="-78"/>
+                <a:ea typeface="Amiri" pitchFamily="2" charset="-78"/>
                 <a:cs typeface="Amiri" pitchFamily="2" charset="-78"/>
               </a:rPr>
               <a:t>أُفَضِّلُ … لِأَنَّ …</a:t>
@@ -42902,6 +43160,7 @@
                   <a:srgbClr val="1B3B6F"/>
                 </a:solidFill>
                 <a:latin typeface="Amiri" pitchFamily="2" charset="-78"/>
+                <a:ea typeface="Amiri" pitchFamily="2" charset="-78"/>
                 <a:cs typeface="Amiri" pitchFamily="2" charset="-78"/>
               </a:rPr>
               <a:t>عِنْدَنَا صَفٌّ مَسَائِيٌّ وَصَفٌّ يَوْمَ السَّبْتِ.</a:t>
@@ -43070,6 +43329,7 @@
                   <a:srgbClr val="1B3B6F"/>
                 </a:solidFill>
                 <a:latin typeface="Amiri" pitchFamily="2" charset="-78"/>
+                <a:ea typeface="Amiri" pitchFamily="2" charset="-78"/>
                 <a:cs typeface="Amiri" pitchFamily="2" charset="-78"/>
               </a:rPr>
               <a:t>مَتَى تَبْدَأُ …؟</a:t>
@@ -43146,6 +43406,7 @@
                   <a:srgbClr val="1B3B6F"/>
                 </a:solidFill>
                 <a:latin typeface="Amiri" pitchFamily="2" charset="-78"/>
+                <a:ea typeface="Amiri" pitchFamily="2" charset="-78"/>
                 <a:cs typeface="Amiri" pitchFamily="2" charset="-78"/>
               </a:rPr>
               <a:t>مُمْتَازٌ. هَلْ عِنْدَكَ سُؤَالٌ؟</a:t>
@@ -43314,6 +43575,7 @@
                   <a:srgbClr val="1B3B6F"/>
                 </a:solidFill>
                 <a:latin typeface="Amiri" pitchFamily="2" charset="-78"/>
+                <a:ea typeface="Amiri" pitchFamily="2" charset="-78"/>
                 <a:cs typeface="Amiri" pitchFamily="2" charset="-78"/>
               </a:rPr>
               <a:t>أَحْتَاجُ إِلَى … وَ…</a:t>
@@ -43390,6 +43652,7 @@
                   <a:srgbClr val="1B3B6F"/>
                 </a:solidFill>
                 <a:latin typeface="Amiri" pitchFamily="2" charset="-78"/>
+                <a:ea typeface="Amiri" pitchFamily="2" charset="-78"/>
                 <a:cs typeface="Amiri" pitchFamily="2" charset="-78"/>
               </a:rPr>
               <a:t>فِي العَاشِرَةِ. مَاذَا تَحْتَاجُ لِلصَّفِّ؟</a:t>
@@ -43664,6 +43927,7 @@
                   <a:srgbClr val="D4AF37"/>
                 </a:solidFill>
                 <a:latin typeface="Amiri" pitchFamily="2" charset="-78"/>
+                <a:ea typeface="Amiri" pitchFamily="2" charset="-78"/>
                 <a:cs typeface="Amiri" pitchFamily="2" charset="-78"/>
               </a:rPr>
               <a:t>م</a:t>
@@ -43984,6 +44248,7 @@
                   <a:srgbClr val="8A6D1E"/>
                 </a:solidFill>
                 <a:latin typeface="Amiri" pitchFamily="2" charset="-78"/>
+                <a:ea typeface="Amiri" pitchFamily="2" charset="-78"/>
                 <a:cs typeface="Amiri" pitchFamily="2" charset="-78"/>
               </a:rPr>
               <a:t>عَمَلٌ جُزْئِيٌّ فِي مَقْهًى</a:t>
@@ -44264,6 +44529,7 @@
                   <a:srgbClr val="1B3B6F"/>
                 </a:solidFill>
                 <a:latin typeface="Amiri" pitchFamily="2" charset="-78"/>
+                <a:ea typeface="Amiri" pitchFamily="2" charset="-78"/>
                 <a:cs typeface="Amiri" pitchFamily="2" charset="-78"/>
               </a:rPr>
               <a:t>رَأَيْتُ إِعْلَانًا عَنْ … وَأَوَدُّ أَنْ …</a:t>
@@ -44340,6 +44606,7 @@
                   <a:srgbClr val="1B3B6F"/>
                 </a:solidFill>
                 <a:latin typeface="Amiri" pitchFamily="2" charset="-78"/>
+                <a:ea typeface="Amiri" pitchFamily="2" charset="-78"/>
                 <a:cs typeface="Amiri" pitchFamily="2" charset="-78"/>
               </a:rPr>
               <a:t>مَقْهَى الوَاحَةِ، تَفَضَّلْ.</a:t>
@@ -44508,6 +44775,7 @@
                   <a:srgbClr val="1B3B6F"/>
                 </a:solidFill>
                 <a:latin typeface="Amiri" pitchFamily="2" charset="-78"/>
+                <a:ea typeface="Amiri" pitchFamily="2" charset="-78"/>
                 <a:cs typeface="Amiri" pitchFamily="2" charset="-78"/>
               </a:rPr>
               <a:t>نَعَمْ، كُنْتُ أَعْمَلُ فِي … فِي العُطَلِ</a:t>
@@ -44584,6 +44852,7 @@
                   <a:srgbClr val="1B3B6F"/>
                 </a:solidFill>
                 <a:latin typeface="Amiri" pitchFamily="2" charset="-78"/>
+                <a:ea typeface="Amiri" pitchFamily="2" charset="-78"/>
                 <a:cs typeface="Amiri" pitchFamily="2" charset="-78"/>
               </a:rPr>
               <a:t>هَلْ عَمِلْتَ فِي مَقْهًى مِنْ قَبْلُ؟</a:t>
@@ -44752,6 +45021,7 @@
                   <a:srgbClr val="1B3B6F"/>
                 </a:solidFill>
                 <a:latin typeface="Amiri" pitchFamily="2" charset="-78"/>
+                <a:ea typeface="Amiri" pitchFamily="2" charset="-78"/>
                 <a:cs typeface="Amiri" pitchFamily="2" charset="-78"/>
               </a:rPr>
               <a:t>أَنَا … وَ… ، مَثَلًا …</a:t>
@@ -44828,6 +45098,7 @@
                   <a:srgbClr val="1B3B6F"/>
                 </a:solidFill>
                 <a:latin typeface="Amiri" pitchFamily="2" charset="-78"/>
+                <a:ea typeface="Amiri" pitchFamily="2" charset="-78"/>
                 <a:cs typeface="Amiri" pitchFamily="2" charset="-78"/>
               </a:rPr>
               <a:t>مَا صِفَاتُكَ الشَّخْصِيَّةُ؟</a:t>
@@ -44931,6 +45202,7 @@
                   <a:srgbClr val="1B3B6F"/>
                 </a:solidFill>
                 <a:latin typeface="Amiri" pitchFamily="2" charset="-78"/>
+                <a:ea typeface="Amiri" pitchFamily="2" charset="-78"/>
                 <a:cs typeface="Amiri" pitchFamily="2" charset="-78"/>
               </a:rPr>
               <a:t>كَمِ الرَّاتِبُ فِي السَّاعَةِ؟ وَهَلْ …؟</a:t>
@@ -45007,6 +45279,7 @@
                   <a:srgbClr val="1B3B6F"/>
                 </a:solidFill>
                 <a:latin typeface="Amiri" pitchFamily="2" charset="-78"/>
+                <a:ea typeface="Amiri" pitchFamily="2" charset="-78"/>
                 <a:cs typeface="Amiri" pitchFamily="2" charset="-78"/>
               </a:rPr>
               <a:t>العَمَلُ يَوْمَ الجُمُعَةِ مِنَ الرَّابِعَةِ إِلَى التَّاسِعَةِ.</a:t>
@@ -45110,6 +45383,7 @@
                   <a:srgbClr val="1B3B6F"/>
                 </a:solidFill>
                 <a:latin typeface="Amiri" pitchFamily="2" charset="-78"/>
+                <a:ea typeface="Amiri" pitchFamily="2" charset="-78"/>
                 <a:cs typeface="Amiri" pitchFamily="2" charset="-78"/>
               </a:rPr>
               <a:t>سَأُرَاجِعُ … وَلَنْ …</a:t>
@@ -45186,6 +45460,7 @@
                   <a:srgbClr val="1B3B6F"/>
                 </a:solidFill>
                 <a:latin typeface="Amiri" pitchFamily="2" charset="-78"/>
+                <a:ea typeface="Amiri" pitchFamily="2" charset="-78"/>
                 <a:cs typeface="Amiri" pitchFamily="2" charset="-78"/>
               </a:rPr>
               <a:t>وَكَيْفَ سَتُوَفِّقُ بَيْنَ العَمَلِ وَالدِّرَاسَةِ؟</a:t>
@@ -45360,13 +45635,9 @@
     <a:fontScheme name="Office">
       <a:majorFont>
         <a:latin typeface="Calibri Light" panose="020F0302020204030204"/>
-        <a:ea typeface=""/>
-        <a:cs typeface=""/>
-        <a:font script="Jpan" typeface="游ゴシック Light"/>
-        <a:font script="Hang" typeface="맑은 고딕"/>
-        <a:font script="Hans" typeface="等线 Light"/>
-        <a:font script="Hant" typeface="新細明體"/>
-        <a:font script="Arab" typeface="Times New Roman"/>
+        <a:ea typeface="Amiri" pitchFamily="2" charset="-78"/>
+        <a:cs typeface="Amiri" pitchFamily="2" charset="-78"/>
+        <a:font script="Arab" typeface="Amiri"/>
         <a:font script="Hebr" typeface="Times New Roman"/>
         <a:font script="Thai" typeface="Angsana New"/>
         <a:font script="Ethi" typeface="Nyala"/>
@@ -45412,13 +45683,9 @@
       </a:majorFont>
       <a:minorFont>
         <a:latin typeface="Calibri" panose="020F0502020204030204"/>
-        <a:ea typeface=""/>
-        <a:cs typeface=""/>
-        <a:font script="Jpan" typeface="游ゴシック"/>
-        <a:font script="Hang" typeface="맑은 고딕"/>
-        <a:font script="Hans" typeface="等线"/>
-        <a:font script="Hant" typeface="新細明體"/>
-        <a:font script="Arab" typeface="Arial"/>
+        <a:ea typeface="Amiri" pitchFamily="2" charset="-78"/>
+        <a:cs typeface="Amiri" pitchFamily="2" charset="-78"/>
+        <a:font script="Arab" typeface="Amiri"/>
         <a:font script="Hebr" typeface="Arial"/>
         <a:font script="Thai" typeface="Cordia New"/>
         <a:font script="Ethi" typeface="Nyala"/>
